--- a/docs/pitch/Maillage.pptx
+++ b/docs/pitch/Maillage.pptx
@@ -659,12 +659,12 @@
           <a:lstStyle/>
           <a:p>
             <a:r>
-              <a:t>Visuel : capture de l’écran de proposition.</a:t>
-            </a:r>
-          </a:p>
-          <a:p>
-            <a:r>
-              <a:t>Signal [CIAN] : « Voici Maillage », puis passer au téléphone pour la démo. (1 min 40 s avec la démo)</a:t>
+              <a:t>Visuel : capture de l’écran de proposition. Message de fond : une app mobile qui propose des projets à trois partenaires, sur la carte, avec les raisons.</a:t>
+            </a:r>
+          </a:p>
+          <a:p>
+            <a:r>
+              <a:t>Signal [CIAN] : « Voici Maillage », puis passer au téléphone pour la démo. (1 min 45 s avec la démo)</a:t>
             </a:r>
           </a:p>
         </p:txBody>
@@ -829,7 +829,7 @@
           </a:p>
           <a:p>
             <a:r>
-              <a:t>Signal [CIAN] : trois idées seulement : profils cachés tant que non réclamés, fichiers confidentiels non publiés, structure prête pour la Ville. (40 s)</a:t>
+              <a:t>Signal [CIAN] : trois idées seulement : profils cachés tant que non réclamés, fichiers confidentiels non publiés, structure prête pour la Ville. Dire : « Nos profils et nos règles s’appuient sur les colonnes des répertoires de la Ville et sur le Plan d’action Saint-Roch. » (35 s)</a:t>
             </a:r>
           </a:p>
         </p:txBody>
@@ -899,12 +899,12 @@
           <a:lstStyle/>
           <a:p>
             <a:r>
-              <a:t>Visuel : une carte de proposition avec « Pourquoi cette suggestion » et « À confirmer » surlignés; en bas, le test d’IA : « Modèle multilingue dans le navigateur, gratuit, texte sur l’appareil (page /labo/) : 69 s au premier chargement (129 Mo), 13 s ensuite, 0,3 à 0,6 s par phrase. Trouve des profils semblables, pas complémentaires. » À droite : « Phase 2 : l’IA lit la demande libre ».</a:t>
-            </a:r>
-          </a:p>
-          <a:p>
-            <a:r>
-              <a:t>Signal [COÉQUIPIÈRE] : où est l’IA? Nous l’avons testée; elle trouve du semblable, pas du complémentaire, d’où le moteur de règles. Phase 2 : lire la demande libre. Le coût revient à celui qui déploie. (55 s)</a:t>
+              <a:t>Visuel : une carte de proposition avec « Pourquoi cette suggestion » et « À confirmer » surlignés; en bas, en petit : « Chaque suggestion s’explique, sans boîte noire. » Notes du test d’IA (pas sur la diapo, à voix haute seulement si on veut) : « Modèle multilingue dans le navigateur, gratuit, texte sur l’appareil (page /labo/) : 69 s au premier chargement (129 Mo), 13 s ensuite, 0,3 à 0,6 s par phrase. Trouve des profils semblables, pas complémentaires. »</a:t>
+            </a:r>
+          </a:p>
+          <a:p>
+            <a:r>
+              <a:t>Signal [COÉQUIPIÈRE] : verdict d’abord : on l’a testé, on a choisi des règles pour que chaque suggestion s’explique. Chiffres du test seulement si le jury demande. (45 s)</a:t>
             </a:r>
           </a:p>
         </p:txBody>
@@ -999,7 +999,7 @@
           </a:p>
           <a:p>
             <a:r>
-              <a:t>Signal [CIAN] : « Voici comment on le ferait pour de vrai. » (40 s)</a:t>
+              <a:t>Signal [CIAN] : coût : « Hébergement gratuit pour un projet pilote, et une personne à temps partiel à la SDC pour l’accueil et la modération. » Dans la démo aucun message ne part; en pilote, la boucle complète est ce qu’on ajoute. (40 s)</a:t>
             </a:r>
           </a:p>
         </p:txBody>
@@ -4719,7 +4719,7 @@
                 </a:solidFill>
                 <a:latin typeface="Calibri"/>
               </a:rPr>
-              <a:t>Une app mobile qui propose des projets à trois partenaires, sur la carte, avec les raisons.</a:t>
+              <a:t>Les autres apps informent; Maillage fait collaborer : trois partenaires complémentaires, un projet concret.</a:t>
             </a:r>
           </a:p>
         </p:txBody>
@@ -6465,7 +6465,7 @@
                 </a:solidFill>
                 <a:latin typeface="Calibri"/>
               </a:rPr>
-              <a:t>Chaque suggestion explique pourquoi. L’app suggère, les personnes décident.</a:t>
+              <a:t>On l’a testé, on a choisi des règles pour que chaque suggestion s’explique.</a:t>
             </a:r>
           </a:p>
         </p:txBody>
@@ -6588,7 +6588,7 @@
                 </a:solidFill>
                 <a:latin typeface="Calibri"/>
               </a:rPr>
-              <a:t>Règles : chaque raison est visible</a:t>
+              <a:t>Règles visibles</a:t>
             </a:r>
           </a:p>
         </p:txBody>
@@ -6711,7 +6711,7 @@
                 </a:solidFill>
                 <a:latin typeface="Calibri"/>
               </a:rPr>
-              <a:t>Test d’IA : semblable, pas complémentaire</a:t>
+              <a:t>Score pondéré visible</a:t>
             </a:r>
           </a:p>
         </p:txBody>
@@ -6834,7 +6834,7 @@
                 </a:solidFill>
                 <a:latin typeface="Calibri"/>
               </a:rPr>
-              <a:t>Phase 2 : l’IA lit la demande</a:t>
+              <a:t>Phase 2 : l’IA lit la demande libre</a:t>
             </a:r>
           </a:p>
         </p:txBody>
@@ -7211,7 +7211,7 @@
                 </a:solidFill>
                 <a:latin typeface="Calibri"/>
               </a:rPr>
-              <a:t>Maintenant : démo avec données fictives</a:t>
+              <a:t>Maintenant : démo simulée</a:t>
             </a:r>
           </a:p>
         </p:txBody>
@@ -7334,7 +7334,7 @@
                 </a:solidFill>
                 <a:latin typeface="Calibri"/>
               </a:rPr>
-              <a:t>Ensuite : pilote avec la SDC</a:t>
+              <a:t>Pilote : chaque partenaire reçoit l’invitation et accepte</a:t>
             </a:r>
           </a:p>
         </p:txBody>
@@ -7457,7 +7457,7 @@
                 </a:solidFill>
                 <a:latin typeface="Calibri"/>
               </a:rPr>
-              <a:t>Plus tard : IA et autres quartiers</a:t>
+              <a:t>Plus tard : IA, autres quartiers</a:t>
             </a:r>
           </a:p>
         </p:txBody>

--- a/docs/pitch/Maillage.pptx
+++ b/docs/pitch/Maillage.pptx
@@ -4973,7 +4973,7 @@
                 </a:solidFill>
                 <a:latin typeface="Calibri"/>
               </a:rPr>
-              <a:t>Commerçant, besoin, proposition à trois (86 %), Ça m’intéresse, projet confirmé (simulé).</a:t>
+              <a:t>Commerçant, besoin, proposition à trois (87 %), Ça m’intéresse, projet confirmé (simulé).</a:t>
             </a:r>
           </a:p>
         </p:txBody>

--- a/docs/pitch/Maillage.pptx
+++ b/docs/pitch/Maillage.pptx
@@ -659,7 +659,7 @@
           <a:lstStyle/>
           <a:p>
             <a:r>
-              <a:t>Visuel : capture de l’écran de proposition. Message de fond : une app mobile qui propose des projets à trois partenaires, sur la carte, avec les raisons.</a:t>
+              <a:t>Visuel : capture de l’écran de proposition. Couleurs (notes) : le vert profond rassure et ancre l’app dans le quartier, l’orange invite à agir; chaque couleur respecte les contrastes d’accessibilité et les épingles combinent forme, icône et couleur pour les personnes daltoniennes (environ 8 % des hommes). Phrase complète à dire : « Maillage ne remplace aucun outil existant : il crée le lien qui manque entre ceux qui ont des ressources et ceux qui ont des projets. » Message de fond : une app mobile qui propose des projets à trois partenaires, sur la carte, avec les raisons.</a:t>
             </a:r>
           </a:p>
           <a:p>
@@ -829,7 +829,7 @@
           </a:p>
           <a:p>
             <a:r>
-              <a:t>Signal [CIAN] : trois idées seulement : profils cachés tant que non réclamés, fichiers confidentiels non publiés, structure prête pour la Ville. Dire : « Nos profils et nos règles s’appuient sur les colonnes des répertoires de la Ville et sur le Plan d’action Saint-Roch. » (35 s)</a:t>
+              <a:t>Signal [CIAN] : trois idées seulement : profils cachés tant que non réclamés, fichiers confidentiels non publiés, structure prête pour la Ville. Dire : « La Ville et ses partenaires recensent déjà 614 organismes reconnus, 337 organismes soutenus, 487 entreprises dans Saint-Roch, 386 membres de la SDC, 1 960 installations et 379 événements à venir. Maillage part de ces répertoires : personne ne commence avec une page blanche. » Nos règles s’appuient aussi sur le Plan d’action Saint-Roch. (35 s)</a:t>
             </a:r>
           </a:p>
         </p:txBody>
@@ -899,12 +899,12 @@
           <a:lstStyle/>
           <a:p>
             <a:r>
-              <a:t>Visuel : une carte de proposition avec « Pourquoi cette suggestion » et « À confirmer » surlignés; en bas, en petit : « Chaque suggestion s’explique, sans boîte noire. » Notes du test d’IA (pas sur la diapo, à voix haute seulement si on veut) : « Modèle multilingue dans le navigateur, gratuit, texte sur l’appareil (page /labo/) : 69 s au premier chargement (129 Mo), 13 s ensuite, 0,3 à 0,6 s par phrase. Trouve des profils semblables, pas complémentaires. »</a:t>
-            </a:r>
-          </a:p>
-          <a:p>
-            <a:r>
-              <a:t>Signal [COÉQUIPIÈRE] : verdict d’abord : on l’a testé, on a choisi des règles pour que chaque suggestion s’explique. Chiffres du test seulement si le jury demande. (45 s)</a:t>
+              <a:t>Visuel : une carte de proposition avec « Pourquoi cette suggestion » et « À confirmer » surlignés; en bas, en petit : « Chaque suggestion s’explique. » Notes du test d’IA (pas sur la diapo, à voix haute seulement si on veut) : « Modèle multilingue dans le navigateur, gratuit, texte sur l’appareil (page /labo/) : 69 s au premier chargement (129 Mo), 13 s ensuite, 0,3 à 0,6 s par phrase. Trouve des profils semblables, pas complémentaires. »</a:t>
+            </a:r>
+          </a:p>
+          <a:p>
+            <a:r>
+              <a:t>Signal [COÉQUIPIÈRE] : verdict d’abord : on l’a testé, on a choisi des règles pour que chaque suggestion s’explique. Chiffres du test seulement si le jury demande. (35 s)</a:t>
             </a:r>
           </a:p>
         </p:txBody>
@@ -999,7 +999,12 @@
           </a:p>
           <a:p>
             <a:r>
-              <a:t>Signal [CIAN] : coût : « Hébergement gratuit pour un projet pilote, et une personne à temps partiel à la SDC pour l’accueil et la modération. » Dans la démo aucun message ne part; en pilote, la boucle complète est ce qu’on ajoute. (40 s)</a:t>
+              <a:t>Signal [CIAN] : portée : « Maillage règle un problème précis, de bout en bout : trouver le bon partenaire, se mettre d’accord, se coordonner et passer à l’action. On s’arrête là où d’autres outils existent (311, 911, plateformes de financement). » Puis coût : « Hébergement gratuit pour un projet pilote, et une personne à temps partiel à la SDC pour l’accueil et la modération. » Dans la démo aucun message ne part; en pilote, la boucle complète est ce qu’on ajoute. (50 s)</a:t>
+            </a:r>
+          </a:p>
+          <a:p>
+            <a:r>
+              <a:t>À ajouter à la feuille de route seulement si non démontré en direct : Explorer le quartier, profils publics, fil de projet, projets ouverts.</a:t>
             </a:r>
           </a:p>
         </p:txBody>
@@ -4465,14 +4470,383 @@
                 </a:solidFill>
                 <a:latin typeface="Calibri"/>
               </a:rPr>
-              <a:t>Les ressources de Saint-Roch sont là, mais les voisins ne se connaissent pas.</a:t>
-            </a:r>
-          </a:p>
-        </p:txBody>
-      </p:sp>
-      <p:sp>
-        <p:nvSpPr>
-          <p:cNvPr id="6" name="TextBox 5"/>
+              <a:t>Les initiatives existent. Ce qui manque, c’est le réseau qui les relie.</a:t>
+            </a:r>
+          </a:p>
+        </p:txBody>
+      </p:sp>
+      <p:sp>
+        <p:nvSpPr>
+          <p:cNvPr id="6" name="Rounded Rectangle 5"/>
+          <p:cNvSpPr/>
+          <p:nvPr/>
+        </p:nvSpPr>
+        <p:spPr>
+          <a:xfrm>
+            <a:off x="640080" y="3337560"/>
+            <a:ext cx="3484778" cy="2377440"/>
+          </a:xfrm>
+          <a:prstGeom prst="roundRect">
+            <a:avLst/>
+          </a:prstGeom>
+          <a:solidFill>
+            <a:srgbClr val="FFFFFF"/>
+          </a:solidFill>
+          <a:ln>
+            <a:noFill/>
+          </a:ln>
+          <a:effectLst/>
+        </p:spPr>
+        <p:style>
+          <a:lnRef idx="1">
+            <a:schemeClr val="accent1"/>
+          </a:lnRef>
+          <a:fillRef idx="3">
+            <a:schemeClr val="accent1"/>
+          </a:fillRef>
+          <a:effectRef idx="2">
+            <a:schemeClr val="accent1"/>
+          </a:effectRef>
+          <a:fontRef idx="minor">
+            <a:schemeClr val="lt1"/>
+          </a:fontRef>
+        </p:style>
+        <p:txBody>
+          <a:bodyPr rtlCol="0" anchor="ctr"/>
+          <a:lstStyle/>
+          <a:p>
+            <a:pPr algn="ctr"/>
+          </a:p>
+        </p:txBody>
+      </p:sp>
+      <p:sp>
+        <p:nvSpPr>
+          <p:cNvPr id="7" name="Rectangle 6"/>
+          <p:cNvSpPr/>
+          <p:nvPr/>
+        </p:nvSpPr>
+        <p:spPr>
+          <a:xfrm>
+            <a:off x="640080" y="3337560"/>
+            <a:ext cx="3484778" cy="109728"/>
+          </a:xfrm>
+          <a:prstGeom prst="rect">
+            <a:avLst/>
+          </a:prstGeom>
+          <a:solidFill>
+            <a:srgbClr val="E8833A"/>
+          </a:solidFill>
+          <a:ln>
+            <a:noFill/>
+          </a:ln>
+          <a:effectLst/>
+        </p:spPr>
+        <p:style>
+          <a:lnRef idx="1">
+            <a:schemeClr val="accent1"/>
+          </a:lnRef>
+          <a:fillRef idx="3">
+            <a:schemeClr val="accent1"/>
+          </a:fillRef>
+          <a:effectRef idx="2">
+            <a:schemeClr val="accent1"/>
+          </a:effectRef>
+          <a:fontRef idx="minor">
+            <a:schemeClr val="lt1"/>
+          </a:fontRef>
+        </p:style>
+        <p:txBody>
+          <a:bodyPr rtlCol="0" anchor="ctr"/>
+          <a:lstStyle/>
+          <a:p>
+            <a:pPr algn="ctr"/>
+          </a:p>
+        </p:txBody>
+      </p:sp>
+      <p:sp>
+        <p:nvSpPr>
+          <p:cNvPr id="8" name="TextBox 7"/>
+          <p:cNvSpPr txBox="1"/>
+          <p:nvPr/>
+        </p:nvSpPr>
+        <p:spPr>
+          <a:xfrm>
+            <a:off x="822960" y="3566160"/>
+            <a:ext cx="3119018" cy="2011680"/>
+          </a:xfrm>
+          <a:prstGeom prst="rect">
+            <a:avLst/>
+          </a:prstGeom>
+          <a:noFill/>
+        </p:spPr>
+        <p:txBody>
+          <a:bodyPr wrap="square" anchor="ctr">
+            <a:spAutoFit/>
+          </a:bodyPr>
+          <a:lstStyle/>
+          <a:p>
+            <a:pPr algn="l"/>
+            <a:r>
+              <a:rPr sz="2400" b="0">
+                <a:solidFill>
+                  <a:srgbClr val="222B27"/>
+                </a:solidFill>
+                <a:latin typeface="Calibri"/>
+              </a:rPr>
+              <a:t>Un café</a:t>
+            </a:r>
+          </a:p>
+        </p:txBody>
+      </p:sp>
+      <p:sp>
+        <p:nvSpPr>
+          <p:cNvPr id="9" name="Rounded Rectangle 8"/>
+          <p:cNvSpPr/>
+          <p:nvPr/>
+        </p:nvSpPr>
+        <p:spPr>
+          <a:xfrm>
+            <a:off x="4353458" y="3337560"/>
+            <a:ext cx="3484778" cy="2377440"/>
+          </a:xfrm>
+          <a:prstGeom prst="roundRect">
+            <a:avLst/>
+          </a:prstGeom>
+          <a:solidFill>
+            <a:srgbClr val="FFFFFF"/>
+          </a:solidFill>
+          <a:ln>
+            <a:noFill/>
+          </a:ln>
+          <a:effectLst/>
+        </p:spPr>
+        <p:style>
+          <a:lnRef idx="1">
+            <a:schemeClr val="accent1"/>
+          </a:lnRef>
+          <a:fillRef idx="3">
+            <a:schemeClr val="accent1"/>
+          </a:fillRef>
+          <a:effectRef idx="2">
+            <a:schemeClr val="accent1"/>
+          </a:effectRef>
+          <a:fontRef idx="minor">
+            <a:schemeClr val="lt1"/>
+          </a:fontRef>
+        </p:style>
+        <p:txBody>
+          <a:bodyPr rtlCol="0" anchor="ctr"/>
+          <a:lstStyle/>
+          <a:p>
+            <a:pPr algn="ctr"/>
+          </a:p>
+        </p:txBody>
+      </p:sp>
+      <p:sp>
+        <p:nvSpPr>
+          <p:cNvPr id="10" name="Rectangle 9"/>
+          <p:cNvSpPr/>
+          <p:nvPr/>
+        </p:nvSpPr>
+        <p:spPr>
+          <a:xfrm>
+            <a:off x="4353458" y="3337560"/>
+            <a:ext cx="3484778" cy="109728"/>
+          </a:xfrm>
+          <a:prstGeom prst="rect">
+            <a:avLst/>
+          </a:prstGeom>
+          <a:solidFill>
+            <a:srgbClr val="E8833A"/>
+          </a:solidFill>
+          <a:ln>
+            <a:noFill/>
+          </a:ln>
+          <a:effectLst/>
+        </p:spPr>
+        <p:style>
+          <a:lnRef idx="1">
+            <a:schemeClr val="accent1"/>
+          </a:lnRef>
+          <a:fillRef idx="3">
+            <a:schemeClr val="accent1"/>
+          </a:fillRef>
+          <a:effectRef idx="2">
+            <a:schemeClr val="accent1"/>
+          </a:effectRef>
+          <a:fontRef idx="minor">
+            <a:schemeClr val="lt1"/>
+          </a:fontRef>
+        </p:style>
+        <p:txBody>
+          <a:bodyPr rtlCol="0" anchor="ctr"/>
+          <a:lstStyle/>
+          <a:p>
+            <a:pPr algn="ctr"/>
+          </a:p>
+        </p:txBody>
+      </p:sp>
+      <p:sp>
+        <p:nvSpPr>
+          <p:cNvPr id="11" name="TextBox 10"/>
+          <p:cNvSpPr txBox="1"/>
+          <p:nvPr/>
+        </p:nvSpPr>
+        <p:spPr>
+          <a:xfrm>
+            <a:off x="4536338" y="3566160"/>
+            <a:ext cx="3119018" cy="2011680"/>
+          </a:xfrm>
+          <a:prstGeom prst="rect">
+            <a:avLst/>
+          </a:prstGeom>
+          <a:noFill/>
+        </p:spPr>
+        <p:txBody>
+          <a:bodyPr wrap="square" anchor="ctr">
+            <a:spAutoFit/>
+          </a:bodyPr>
+          <a:lstStyle/>
+          <a:p>
+            <a:pPr algn="l"/>
+            <a:r>
+              <a:rPr sz="2400" b="0">
+                <a:solidFill>
+                  <a:srgbClr val="222B27"/>
+                </a:solidFill>
+                <a:latin typeface="Calibri"/>
+              </a:rPr>
+              <a:t>Une artiste</a:t>
+            </a:r>
+          </a:p>
+        </p:txBody>
+      </p:sp>
+      <p:sp>
+        <p:nvSpPr>
+          <p:cNvPr id="12" name="Rounded Rectangle 11"/>
+          <p:cNvSpPr/>
+          <p:nvPr/>
+        </p:nvSpPr>
+        <p:spPr>
+          <a:xfrm>
+            <a:off x="8066836" y="3337560"/>
+            <a:ext cx="3484778" cy="2377440"/>
+          </a:xfrm>
+          <a:prstGeom prst="roundRect">
+            <a:avLst/>
+          </a:prstGeom>
+          <a:solidFill>
+            <a:srgbClr val="FFFFFF"/>
+          </a:solidFill>
+          <a:ln>
+            <a:noFill/>
+          </a:ln>
+          <a:effectLst/>
+        </p:spPr>
+        <p:style>
+          <a:lnRef idx="1">
+            <a:schemeClr val="accent1"/>
+          </a:lnRef>
+          <a:fillRef idx="3">
+            <a:schemeClr val="accent1"/>
+          </a:fillRef>
+          <a:effectRef idx="2">
+            <a:schemeClr val="accent1"/>
+          </a:effectRef>
+          <a:fontRef idx="minor">
+            <a:schemeClr val="lt1"/>
+          </a:fontRef>
+        </p:style>
+        <p:txBody>
+          <a:bodyPr rtlCol="0" anchor="ctr"/>
+          <a:lstStyle/>
+          <a:p>
+            <a:pPr algn="ctr"/>
+          </a:p>
+        </p:txBody>
+      </p:sp>
+      <p:sp>
+        <p:nvSpPr>
+          <p:cNvPr id="13" name="Rectangle 12"/>
+          <p:cNvSpPr/>
+          <p:nvPr/>
+        </p:nvSpPr>
+        <p:spPr>
+          <a:xfrm>
+            <a:off x="8066836" y="3337560"/>
+            <a:ext cx="3484778" cy="109728"/>
+          </a:xfrm>
+          <a:prstGeom prst="rect">
+            <a:avLst/>
+          </a:prstGeom>
+          <a:solidFill>
+            <a:srgbClr val="E8833A"/>
+          </a:solidFill>
+          <a:ln>
+            <a:noFill/>
+          </a:ln>
+          <a:effectLst/>
+        </p:spPr>
+        <p:style>
+          <a:lnRef idx="1">
+            <a:schemeClr val="accent1"/>
+          </a:lnRef>
+          <a:fillRef idx="3">
+            <a:schemeClr val="accent1"/>
+          </a:fillRef>
+          <a:effectRef idx="2">
+            <a:schemeClr val="accent1"/>
+          </a:effectRef>
+          <a:fontRef idx="minor">
+            <a:schemeClr val="lt1"/>
+          </a:fontRef>
+        </p:style>
+        <p:txBody>
+          <a:bodyPr rtlCol="0" anchor="ctr"/>
+          <a:lstStyle/>
+          <a:p>
+            <a:pPr algn="ctr"/>
+          </a:p>
+        </p:txBody>
+      </p:sp>
+      <p:sp>
+        <p:nvSpPr>
+          <p:cNvPr id="14" name="TextBox 13"/>
+          <p:cNvSpPr txBox="1"/>
+          <p:nvPr/>
+        </p:nvSpPr>
+        <p:spPr>
+          <a:xfrm>
+            <a:off x="8249716" y="3566160"/>
+            <a:ext cx="3119018" cy="2011680"/>
+          </a:xfrm>
+          <a:prstGeom prst="rect">
+            <a:avLst/>
+          </a:prstGeom>
+          <a:noFill/>
+        </p:spPr>
+        <p:txBody>
+          <a:bodyPr wrap="square" anchor="ctr">
+            <a:spAutoFit/>
+          </a:bodyPr>
+          <a:lstStyle/>
+          <a:p>
+            <a:pPr algn="l"/>
+            <a:r>
+              <a:rPr sz="2400" b="0">
+                <a:solidFill>
+                  <a:srgbClr val="222B27"/>
+                </a:solidFill>
+                <a:latin typeface="Calibri"/>
+              </a:rPr>
+              <a:t>Un organisme</a:t>
+            </a:r>
+          </a:p>
+        </p:txBody>
+      </p:sp>
+      <p:sp>
+        <p:nvSpPr>
+          <p:cNvPr id="15" name="TextBox 14"/>
           <p:cNvSpPr txBox="1"/>
           <p:nvPr/>
         </p:nvSpPr>
@@ -4507,7 +4881,7 @@
       </p:sp>
       <p:sp>
         <p:nvSpPr>
-          <p:cNvPr id="7" name="TextBox 6"/>
+          <p:cNvPr id="16" name="TextBox 15"/>
           <p:cNvSpPr txBox="1"/>
           <p:nvPr/>
         </p:nvSpPr>
@@ -4719,7 +5093,7 @@
                 </a:solidFill>
                 <a:latin typeface="Calibri"/>
               </a:rPr>
-              <a:t>Les autres apps informent; Maillage fait collaborer : trois partenaires complémentaires, un projet concret.</a:t>
+              <a:t>Maillage ne remplace aucun outil existant : il crée le lien qui manque.</a:t>
             </a:r>
           </a:p>
         </p:txBody>
@@ -5842,7 +6216,7 @@
                 </a:solidFill>
                 <a:latin typeface="Calibri"/>
               </a:rPr>
-              <a:t>Une app web légère, des données ouvertes, des profils protégés.</a:t>
+              <a:t>Personne ne commence avec une page blanche.</a:t>
             </a:r>
           </a:p>
         </p:txBody>
@@ -5856,7 +6230,7 @@
         <p:spPr>
           <a:xfrm>
             <a:off x="640080" y="3337560"/>
-            <a:ext cx="3484778" cy="2377440"/>
+            <a:ext cx="2556433" cy="2377440"/>
           </a:xfrm>
           <a:prstGeom prst="roundRect">
             <a:avLst/>
@@ -5900,7 +6274,7 @@
         <p:spPr>
           <a:xfrm>
             <a:off x="640080" y="3337560"/>
-            <a:ext cx="3484778" cy="109728"/>
+            <a:ext cx="2556433" cy="109728"/>
           </a:xfrm>
           <a:prstGeom prst="rect">
             <a:avLst/>
@@ -5944,7 +6318,7 @@
         <p:spPr>
           <a:xfrm>
             <a:off x="822960" y="3566160"/>
-            <a:ext cx="3119018" cy="2011680"/>
+            <a:ext cx="2190673" cy="2011680"/>
           </a:xfrm>
           <a:prstGeom prst="rect">
             <a:avLst/>
@@ -5959,7 +6333,7 @@
           <a:p>
             <a:pPr algn="l"/>
             <a:r>
-              <a:rPr sz="2400" b="0">
+              <a:rPr sz="2000" b="0">
                 <a:solidFill>
                   <a:srgbClr val="222B27"/>
                 </a:solidFill>
@@ -5978,8 +6352,8 @@
         </p:nvSpPr>
         <p:spPr>
           <a:xfrm>
-            <a:off x="4353458" y="3337560"/>
-            <a:ext cx="3484778" cy="2377440"/>
+            <a:off x="3425113" y="3337560"/>
+            <a:ext cx="2556433" cy="2377440"/>
           </a:xfrm>
           <a:prstGeom prst="roundRect">
             <a:avLst/>
@@ -6022,8 +6396,8 @@
         </p:nvSpPr>
         <p:spPr>
           <a:xfrm>
-            <a:off x="4353458" y="3337560"/>
-            <a:ext cx="3484778" cy="109728"/>
+            <a:off x="3425113" y="3337560"/>
+            <a:ext cx="2556433" cy="109728"/>
           </a:xfrm>
           <a:prstGeom prst="rect">
             <a:avLst/>
@@ -6066,8 +6440,8 @@
         </p:nvSpPr>
         <p:spPr>
           <a:xfrm>
-            <a:off x="4536338" y="3566160"/>
-            <a:ext cx="3119018" cy="2011680"/>
+            <a:off x="3607993" y="3566160"/>
+            <a:ext cx="2190673" cy="2011680"/>
           </a:xfrm>
           <a:prstGeom prst="rect">
             <a:avLst/>
@@ -6082,7 +6456,7 @@
           <a:p>
             <a:pPr algn="l"/>
             <a:r>
-              <a:rPr sz="2400" b="0">
+              <a:rPr sz="2000" b="0">
                 <a:solidFill>
                   <a:srgbClr val="222B27"/>
                 </a:solidFill>
@@ -6101,8 +6475,8 @@
         </p:nvSpPr>
         <p:spPr>
           <a:xfrm>
-            <a:off x="8066836" y="3337560"/>
-            <a:ext cx="3484778" cy="2377440"/>
+            <a:off x="6210146" y="3337560"/>
+            <a:ext cx="2556433" cy="2377440"/>
           </a:xfrm>
           <a:prstGeom prst="roundRect">
             <a:avLst/>
@@ -6145,8 +6519,8 @@
         </p:nvSpPr>
         <p:spPr>
           <a:xfrm>
-            <a:off x="8066836" y="3337560"/>
-            <a:ext cx="3484778" cy="109728"/>
+            <a:off x="6210146" y="3337560"/>
+            <a:ext cx="2556433" cy="109728"/>
           </a:xfrm>
           <a:prstGeom prst="rect">
             <a:avLst/>
@@ -6189,8 +6563,8 @@
         </p:nvSpPr>
         <p:spPr>
           <a:xfrm>
-            <a:off x="8249716" y="3566160"/>
-            <a:ext cx="3119018" cy="2011680"/>
+            <a:off x="6393026" y="3566160"/>
+            <a:ext cx="2190673" cy="2011680"/>
           </a:xfrm>
           <a:prstGeom prst="rect">
             <a:avLst/>
@@ -6205,20 +6579,143 @@
           <a:p>
             <a:pPr algn="l"/>
             <a:r>
-              <a:rPr sz="2400" b="0">
+              <a:rPr sz="2000" b="0">
                 <a:solidFill>
                   <a:srgbClr val="222B27"/>
                 </a:solidFill>
                 <a:latin typeface="Calibri"/>
               </a:rPr>
-              <a:t>Données Québec ouvertes, fichiers de la Ville : structure seulement</a:t>
-            </a:r>
-          </a:p>
-        </p:txBody>
-      </p:sp>
-      <p:sp>
-        <p:nvSpPr>
-          <p:cNvPr id="15" name="TextBox 14"/>
+              <a:t>Répertoires de la Ville (structure seulement) : 614 organismes reconnus, 337 soutenus, 487 entreprises, 386 membres SDC, 1 960 installations, 379 événements</a:t>
+            </a:r>
+          </a:p>
+        </p:txBody>
+      </p:sp>
+      <p:sp>
+        <p:nvSpPr>
+          <p:cNvPr id="15" name="Rounded Rectangle 14"/>
+          <p:cNvSpPr/>
+          <p:nvPr/>
+        </p:nvSpPr>
+        <p:spPr>
+          <a:xfrm>
+            <a:off x="8995179" y="3337560"/>
+            <a:ext cx="2556433" cy="2377440"/>
+          </a:xfrm>
+          <a:prstGeom prst="roundRect">
+            <a:avLst/>
+          </a:prstGeom>
+          <a:solidFill>
+            <a:srgbClr val="FFFFFF"/>
+          </a:solidFill>
+          <a:ln>
+            <a:noFill/>
+          </a:ln>
+          <a:effectLst/>
+        </p:spPr>
+        <p:style>
+          <a:lnRef idx="1">
+            <a:schemeClr val="accent1"/>
+          </a:lnRef>
+          <a:fillRef idx="3">
+            <a:schemeClr val="accent1"/>
+          </a:fillRef>
+          <a:effectRef idx="2">
+            <a:schemeClr val="accent1"/>
+          </a:effectRef>
+          <a:fontRef idx="minor">
+            <a:schemeClr val="lt1"/>
+          </a:fontRef>
+        </p:style>
+        <p:txBody>
+          <a:bodyPr rtlCol="0" anchor="ctr"/>
+          <a:lstStyle/>
+          <a:p>
+            <a:pPr algn="ctr"/>
+          </a:p>
+        </p:txBody>
+      </p:sp>
+      <p:sp>
+        <p:nvSpPr>
+          <p:cNvPr id="16" name="Rectangle 15"/>
+          <p:cNvSpPr/>
+          <p:nvPr/>
+        </p:nvSpPr>
+        <p:spPr>
+          <a:xfrm>
+            <a:off x="8995179" y="3337560"/>
+            <a:ext cx="2556433" cy="109728"/>
+          </a:xfrm>
+          <a:prstGeom prst="rect">
+            <a:avLst/>
+          </a:prstGeom>
+          <a:solidFill>
+            <a:srgbClr val="E8833A"/>
+          </a:solidFill>
+          <a:ln>
+            <a:noFill/>
+          </a:ln>
+          <a:effectLst/>
+        </p:spPr>
+        <p:style>
+          <a:lnRef idx="1">
+            <a:schemeClr val="accent1"/>
+          </a:lnRef>
+          <a:fillRef idx="3">
+            <a:schemeClr val="accent1"/>
+          </a:fillRef>
+          <a:effectRef idx="2">
+            <a:schemeClr val="accent1"/>
+          </a:effectRef>
+          <a:fontRef idx="minor">
+            <a:schemeClr val="lt1"/>
+          </a:fontRef>
+        </p:style>
+        <p:txBody>
+          <a:bodyPr rtlCol="0" anchor="ctr"/>
+          <a:lstStyle/>
+          <a:p>
+            <a:pPr algn="ctr"/>
+          </a:p>
+        </p:txBody>
+      </p:sp>
+      <p:sp>
+        <p:nvSpPr>
+          <p:cNvPr id="17" name="TextBox 16"/>
+          <p:cNvSpPr txBox="1"/>
+          <p:nvPr/>
+        </p:nvSpPr>
+        <p:spPr>
+          <a:xfrm>
+            <a:off x="9178059" y="3566160"/>
+            <a:ext cx="2190673" cy="2011680"/>
+          </a:xfrm>
+          <a:prstGeom prst="rect">
+            <a:avLst/>
+          </a:prstGeom>
+          <a:noFill/>
+        </p:spPr>
+        <p:txBody>
+          <a:bodyPr wrap="square" anchor="ctr">
+            <a:spAutoFit/>
+          </a:bodyPr>
+          <a:lstStyle/>
+          <a:p>
+            <a:pPr algn="l"/>
+            <a:r>
+              <a:rPr sz="2000" b="0">
+                <a:solidFill>
+                  <a:srgbClr val="222B27"/>
+                </a:solidFill>
+                <a:latin typeface="Calibri"/>
+              </a:rPr>
+              <a:t>Données Québec ouvertes</a:t>
+            </a:r>
+          </a:p>
+        </p:txBody>
+      </p:sp>
+      <p:sp>
+        <p:nvSpPr>
+          <p:cNvPr id="18" name="TextBox 17"/>
           <p:cNvSpPr txBox="1"/>
           <p:nvPr/>
         </p:nvSpPr>
@@ -6253,7 +6750,7 @@
       </p:sp>
       <p:sp>
         <p:nvSpPr>
-          <p:cNvPr id="16" name="TextBox 15"/>
+          <p:cNvPr id="19" name="TextBox 18"/>
           <p:cNvSpPr txBox="1"/>
           <p:nvPr/>
         </p:nvSpPr>

--- a/docs/pitch/Maillage.pptx
+++ b/docs/pitch/Maillage.pptx
@@ -1000,6 +1000,11 @@
           <a:p>
             <a:r>
               <a:t>Signal [CIAN] : portée : « Maillage règle un problème précis, de bout en bout : trouver le bon partenaire, se mettre d’accord, se coordonner et passer à l’action. On s’arrête là où d’autres outils existent (311, 911, plateformes de financement). » Puis coût : « Hébergement gratuit pour un projet pilote, et une personne à temps partiel à la SDC pour l’accueil et la modération. » Dans la démo aucun message ne part; en pilote, la boucle complète est ce qu’on ajoute. (50 s)</a:t>
+            </a:r>
+          </a:p>
+          <a:p>
+            <a:r>
+              <a:t>Histoire 2 (visite guidée ou une diapo, pas en direct) : Sofia, résidente de la rue Saint-Joseph, voit des graffitis et des déchets; Maillage lui propose une « Corvée de propreté avec Équipe Propreté du Faubourg », des bénévoles et un café du coin, avec la liste « autorisation du propriétaire, 311 pour la voie publique ». Noms fictifs.</a:t>
             </a:r>
           </a:p>
           <a:p>

--- a/docs/pitch/Maillage.pptx
+++ b/docs/pitch/Maillage.pptx
@@ -12,7 +12,6 @@
     <p:sldId id="260" r:id="rId12"/>
     <p:sldId id="261" r:id="rId13"/>
     <p:sldId id="262" r:id="rId14"/>
-    <p:sldId id="263" r:id="rId15"/>
   </p:sldIdLst>
   <p:sldSz cx="12191695" cy="6858000" type="screen4x3"/>
   <p:notesSz cx="6858000" cy="9144000"/>
@@ -589,7 +588,12 @@
           </a:p>
           <a:p>
             <a:r>
-              <a:t>Signal [COÉQUIPIÈRE] : histoire de Mathieu (Café Le Petit Détour), de Camille Vézina et du Collectif Les Voisins en Scène. Finir par « Personne ne sait que les autres existent. » (40 s)</a:t>
+              <a:t>Ce qu’on a entendu : une seule vraie citation d’un commerçant rencontré vendredi matin, à écrire sur la diapo avant l’export PDF de 12 h 30. Si on n’a rien de vrai, retirer la carte : ne jamais inventer une citation.</a:t>
+            </a:r>
+          </a:p>
+          <a:p>
+            <a:r>
+              <a:t>Signal [COÉQUIPIÈRE] : histoire de Mathieu (Café Le Petit Détour), de Camille Vézina et du Collectif Les Voisins en Scène. Finir par « Personne ne sait que les deux autres existent. » (30 s)</a:t>
             </a:r>
           </a:p>
         </p:txBody>
@@ -664,7 +668,7 @@
           </a:p>
           <a:p>
             <a:r>
-              <a:t>Signal [CIAN] : « Voici Maillage », puis passer au téléphone pour la démo. (1 min 45 s avec la démo)</a:t>
+              <a:t>Signal [CIAN] : « Voyons comment ça marche », puis passer à l’app : coller la phrase « On a un espace libre le jeudi soir et on cherche des artistes pour l’animer », 87 % avec Camille Vézina et le Collectif Les Voisins en Scène, dire la réciprocité, puis « Voir ce que Camille reçoit » et « Accepter ». Si l’app plante : Visite guidée (environ 57 s). (1 min 50 s avec la démo)</a:t>
             </a:r>
           </a:p>
         </p:txBody>
@@ -734,12 +738,27 @@
           <a:lstStyle/>
           <a:p>
             <a:r>
-              <a:t>Visuel : les 5 étapes en frise, badge « Démo simulée ».</a:t>
-            </a:r>
-          </a:p>
-          <a:p>
-            <a:r>
-              <a:t>Signal [CIAN] : à garder à l’écran si l’app plante, puis lancer la vidéo de secours. (peut être sautée si le temps manque)</a:t>
+              <a:t>Contenu en trois colonnes :</a:t>
+            </a:r>
+          </a:p>
+          <a:p>
+            <a:r>
+              <a:t>- Technologies : Vite, React, TypeScript, MapLibre GL JS.</a:t>
+            </a:r>
+          </a:p>
+          <a:p>
+            <a:r>
+              <a:t>- Outils et plateformes : OpenFreeMap et OpenStreetMap (fond de carte), GitHub Pages (hébergement; Vercel en secours), GitHub (code), Claude Code comme assistant de développement.</a:t>
+            </a:r>
+          </a:p>
+          <a:p>
+            <a:r>
+              <a:t>- Données : Données Québec, données ouvertes de la Ville de Québec et du SIT Québec (CC BY 4.0, attribution dans l’app). Fichiers fournis confidentiels : structure et nombre de lignes seulement, remplacés par des profils fictifs dans la démo. Les nombres sont des totaux de lignes : « les 386 membres du fichier fourni par la SDC », « 614 organismes reconnus à l’échelle de la ville » (jamais « dans Saint-Roch » pour un fichier de toute la ville).</a:t>
+            </a:r>
+          </a:p>
+          <a:p>
+            <a:r>
+              <a:t>Signal [CIAN] : dire « Maillage part des répertoires qui existent déjà : les 386 membres du fichier fourni par la SDC, et 614 organismes reconnus à l’échelle de la ville. Personne ne commence avec une page blanche. » Puis la Loi 25 : « les personnes restent cachées; les commerces et organismes apparaissent avec leur nom public seulement, sans coordonnées, étiquetés pré-remplis, jusqu’à activation ». Nos règles s’appuient aussi sur le Plan d’action Saint-Roch. (35 s)</a:t>
             </a:r>
           </a:p>
         </p:txBody>
@@ -809,27 +828,12 @@
           <a:lstStyle/>
           <a:p>
             <a:r>
-              <a:t>Contenu en trois colonnes :</a:t>
-            </a:r>
-          </a:p>
-          <a:p>
-            <a:r>
-              <a:t>- Technologies : Vite, React, TypeScript, MapLibre GL JS.</a:t>
-            </a:r>
-          </a:p>
-          <a:p>
-            <a:r>
-              <a:t>- Outils et plateformes : OpenFreeMap et OpenStreetMap (fond de carte), Vercel (hébergement), GitHub (code), Claude Code comme assistant de développement.</a:t>
-            </a:r>
-          </a:p>
-          <a:p>
-            <a:r>
-              <a:t>- Données : Données Québec, données ouvertes (licence indiquée dans l’app, à reprendre exactement de chaque jeu de données). Fichiers confidentiels de la Ville : utilisés pour leur structure seulement, remplacés par des lignes fictives dans la démo.</a:t>
-            </a:r>
-          </a:p>
-          <a:p>
-            <a:r>
-              <a:t>Signal [CIAN] : trois idées seulement : profils cachés tant que non réclamés, fichiers confidentiels non publiés, structure prête pour la Ville. Dire : « La Ville et ses partenaires recensent déjà 614 organismes reconnus, 337 organismes soutenus, 487 entreprises dans Saint-Roch, 386 membres de la SDC, 1 960 installations et 379 événements à venir. Maillage part de ces répertoires : personne ne commence avec une page blanche. » Nos règles s’appuient aussi sur le Plan d’action Saint-Roch. (35 s)</a:t>
+              <a:t>Visuel : une carte de proposition avec « Pourquoi cette suggestion » et « À confirmer » surlignés; en bas, en petit : « Chaque suggestion s’explique. » Notes du test d’IA (pas sur la diapo, à voix haute seulement si on veut) : « Modèle multilingue dans le navigateur, gratuit, texte sur l’appareil (page /labo/) : 69 s au premier chargement (129 Mo), 13 s ensuite, 0,3 à 0,6 s par phrase. Trouve des profils semblables, pas complémentaires. »</a:t>
+            </a:r>
+          </a:p>
+          <a:p>
+            <a:r>
+              <a:t>Signal [COÉQUIPIÈRE] : verdict d’abord : on l’a testé, on a choisi des règles pour que chaque suggestion s’explique. Chiffres du test seulement si le jury demande. (20 s)</a:t>
             </a:r>
           </a:p>
         </p:txBody>
@@ -899,12 +903,42 @@
           <a:lstStyle/>
           <a:p>
             <a:r>
-              <a:t>Visuel : une carte de proposition avec « Pourquoi cette suggestion » et « À confirmer » surlignés; en bas, en petit : « Chaque suggestion s’explique. » Notes du test d’IA (pas sur la diapo, à voix haute seulement si on veut) : « Modèle multilingue dans le navigateur, gratuit, texte sur l’appareil (page /labo/) : 69 s au premier chargement (129 Mo), 13 s ensuite, 0,3 à 0,6 s par phrase. Trouve des profils semblables, pas complémentaires. »</a:t>
-            </a:r>
-          </a:p>
-          <a:p>
-            <a:r>
-              <a:t>Signal [COÉQUIPIÈRE] : verdict d’abord : on l’a testé, on a choisi des règles pour que chaque suggestion s’explique. Chiffres du test seulement si le jury demande. (35 s)</a:t>
+              <a:t>Feuille de route en trois temps :</a:t>
+            </a:r>
+          </a:p>
+          <a:p>
+            <a:r>
+              <a:t>- Maintenant : démo avec profils fictifs et données ouvertes.</a:t>
+            </a:r>
+          </a:p>
+          <a:p>
+            <a:r>
+              <a:t>- Ensuite : pilote avec la SDC, profils activés par leurs propriétaires, vraies notifications, fil de projet sur une table gratuite derrière le même écran, modérée par la SDC.</a:t>
+            </a:r>
+          </a:p>
+          <a:p>
+            <a:r>
+              <a:t>- Plus tard : modèle de langage pour lire les demandes, autres quartiers.</a:t>
+            </a:r>
+          </a:p>
+          <a:p>
+            <a:r>
+              <a:t>Mesures : projets confirmés, nouveaux partenariats, fréquentation des événements créés.</a:t>
+            </a:r>
+          </a:p>
+          <a:p>
+            <a:r>
+              <a:t>Signal [CIAN] : portée : « Maillage règle un problème précis : trouver le bon partenaire, se mettre d’accord et passer à l’action. On s’arrête là où d’autres outils existent : 311, 911, financement. » Puis le fil : « Le fil est local aujourd’hui; en pilote, une table gratuite derrière le même écran, modérée par la SDC. » Puis coût : « Le pilote coûte un hébergement gratuit et une personne à temps partiel à la SDC. » (55 s)</a:t>
+            </a:r>
+          </a:p>
+          <a:p>
+            <a:r>
+              <a:t>Histoire 2 (en direct seulement si le temps le permet, voir script-fr.md, démo étape 6 : Accueil, Proposer un projet, Exemple, Avant de commencer) : Sofia, résidente de la rue Saint-Joseph, corvée le samedi 24 octobre de 13 h à 17 h, voit des graffitis et des déchets; Maillage lui propose une « Corvée de propreté avec Équipe Propreté du Faubourg », des bénévoles et un café du coin, avec la liste « autorisation du propriétaire, 311 pour la voie publique ». Noms fictifs.</a:t>
+            </a:r>
+          </a:p>
+          <a:p>
+            <a:r>
+              <a:t>À ajouter à la feuille de route seulement si non démontré en direct : Explorer le quartier, profils publics, fil de projet, projets ouverts.</a:t>
             </a:r>
           </a:p>
         </p:txBody>
@@ -974,112 +1008,7 @@
           <a:lstStyle/>
           <a:p>
             <a:r>
-              <a:t>Feuille de route en trois temps :</a:t>
-            </a:r>
-          </a:p>
-          <a:p>
-            <a:r>
-              <a:t>- Maintenant : démo avec profils fictifs et données ouvertes.</a:t>
-            </a:r>
-          </a:p>
-          <a:p>
-            <a:r>
-              <a:t>- Ensuite : pilote avec la SDC, profils réclamés par leurs propriétaires, vraies notifications.</a:t>
-            </a:r>
-          </a:p>
-          <a:p>
-            <a:r>
-              <a:t>- Plus tard : modèle de langage pour lire les demandes, autres quartiers.</a:t>
-            </a:r>
-          </a:p>
-          <a:p>
-            <a:r>
-              <a:t>Mesures : projets confirmés, nouveaux partenariats, fréquentation des événements créés.</a:t>
-            </a:r>
-          </a:p>
-          <a:p>
-            <a:r>
-              <a:t>Signal [CIAN] : portée : « Maillage règle un problème précis, de bout en bout : trouver le bon partenaire, se mettre d’accord, se coordonner et passer à l’action. On s’arrête là où d’autres outils existent (311, 911, plateformes de financement). » Puis coût : « Hébergement gratuit pour un projet pilote, et une personne à temps partiel à la SDC pour l’accueil et la modération. » Dans la démo aucun message ne part; en pilote, la boucle complète est ce qu’on ajoute. (50 s)</a:t>
-            </a:r>
-          </a:p>
-          <a:p>
-            <a:r>
-              <a:t>Histoire 2 (visite guidée ou une diapo, pas en direct) : Sofia, résidente de la rue Saint-Joseph, voit des graffitis et des déchets; Maillage lui propose une « Corvée de propreté avec Équipe Propreté du Faubourg », des bénévoles et un café du coin, avec la liste « autorisation du propriétaire, 311 pour la voie publique ». Noms fictifs.</a:t>
-            </a:r>
-          </a:p>
-          <a:p>
-            <a:r>
-              <a:t>À ajouter à la feuille de route seulement si non démontré en direct : Explorer le quartier, profils publics, fil de projet, projets ouverts.</a:t>
-            </a:r>
-          </a:p>
-        </p:txBody>
-      </p:sp>
-      <p:sp>
-        <p:nvSpPr>
-          <p:cNvPr id="4" name="Slide Number Placeholder 3"/>
-          <p:cNvSpPr>
-            <a:spLocks noGrp="1"/>
-          </p:cNvSpPr>
-          <p:nvPr>
-            <p:ph type="sldNum" idx="5" sz="quarter"/>
-          </p:nvPr>
-        </p:nvSpPr>
-        <p:spPr/>
-      </p:sp>
-    </p:spTree>
-  </p:cSld>
-  <p:clrMapOvr>
-    <a:masterClrMapping/>
-  </p:clrMapOvr>
-</p:notes>
-</file>
-
-<file path=ppt/notesSlides/notesSlide8.xml><?xml version="1.0" encoding="utf-8"?>
-<p:notes xmlns:a="http://schemas.openxmlformats.org/drawingml/2006/main" xmlns:p="http://schemas.openxmlformats.org/presentationml/2006/main" xmlns:r="http://schemas.openxmlformats.org/officeDocument/2006/relationships">
-  <p:cSld>
-    <p:spTree>
-      <p:nvGrpSpPr>
-        <p:cNvPr id="1" name=""/>
-        <p:cNvGrpSpPr/>
-        <p:nvPr/>
-      </p:nvGrpSpPr>
-      <p:grpSpPr>
-        <a:xfrm>
-          <a:off x="0" y="0"/>
-          <a:ext cx="0" cy="0"/>
-          <a:chOff x="0" y="0"/>
-          <a:chExt cx="0" cy="0"/>
-        </a:xfrm>
-      </p:grpSpPr>
-      <p:sp>
-        <p:nvSpPr>
-          <p:cNvPr id="2" name="Slide Image Placeholder 1"/>
-          <p:cNvSpPr>
-            <a:spLocks noGrp="1"/>
-          </p:cNvSpPr>
-          <p:nvPr>
-            <p:ph type="sldImg" idx="2"/>
-          </p:nvPr>
-        </p:nvSpPr>
-        <p:spPr/>
-      </p:sp>
-      <p:sp>
-        <p:nvSpPr>
-          <p:cNvPr id="3" name="Notes Placeholder 2"/>
-          <p:cNvSpPr>
-            <a:spLocks noGrp="1"/>
-          </p:cNvSpPr>
-          <p:nvPr>
-            <p:ph type="body" idx="3" sz="quarter"/>
-          </p:nvPr>
-        </p:nvSpPr>
-        <p:spPr/>
-        <p:txBody>
-          <a:bodyPr/>
-          <a:lstStyle/>
-          <a:p>
-            <a:r>
-              <a:t>Visuel : la carte, les trois points reliés, l’adresse de l’app (code QR).</a:t>
+              <a:t>Visuel : la carte, les trois points reliés, code QR vers https://cianthiffault2006-png.github.io/hackathon-saint-roch-2026/ (lien officiel, GitHub Pages). Ne pas mettre le lien Vercel : il est figé sur une ancienne version.</a:t>
             </a:r>
           </a:p>
           <a:p>
@@ -4489,7 +4418,7 @@
         <p:spPr>
           <a:xfrm>
             <a:off x="640080" y="3337560"/>
-            <a:ext cx="3484778" cy="2377440"/>
+            <a:ext cx="2556433" cy="2377440"/>
           </a:xfrm>
           <a:prstGeom prst="roundRect">
             <a:avLst/>
@@ -4533,7 +4462,7 @@
         <p:spPr>
           <a:xfrm>
             <a:off x="640080" y="3337560"/>
-            <a:ext cx="3484778" cy="109728"/>
+            <a:ext cx="2556433" cy="109728"/>
           </a:xfrm>
           <a:prstGeom prst="rect">
             <a:avLst/>
@@ -4577,7 +4506,7 @@
         <p:spPr>
           <a:xfrm>
             <a:off x="822960" y="3566160"/>
-            <a:ext cx="3119018" cy="2011680"/>
+            <a:ext cx="2190673" cy="2011680"/>
           </a:xfrm>
           <a:prstGeom prst="rect">
             <a:avLst/>
@@ -4592,7 +4521,7 @@
           <a:p>
             <a:pPr algn="l"/>
             <a:r>
-              <a:rPr sz="2400" b="0">
+              <a:rPr sz="2000" b="0">
                 <a:solidFill>
                   <a:srgbClr val="222B27"/>
                 </a:solidFill>
@@ -4611,8 +4540,8 @@
         </p:nvSpPr>
         <p:spPr>
           <a:xfrm>
-            <a:off x="4353458" y="3337560"/>
-            <a:ext cx="3484778" cy="2377440"/>
+            <a:off x="3425113" y="3337560"/>
+            <a:ext cx="2556433" cy="2377440"/>
           </a:xfrm>
           <a:prstGeom prst="roundRect">
             <a:avLst/>
@@ -4655,8 +4584,8 @@
         </p:nvSpPr>
         <p:spPr>
           <a:xfrm>
-            <a:off x="4353458" y="3337560"/>
-            <a:ext cx="3484778" cy="109728"/>
+            <a:off x="3425113" y="3337560"/>
+            <a:ext cx="2556433" cy="109728"/>
           </a:xfrm>
           <a:prstGeom prst="rect">
             <a:avLst/>
@@ -4699,8 +4628,8 @@
         </p:nvSpPr>
         <p:spPr>
           <a:xfrm>
-            <a:off x="4536338" y="3566160"/>
-            <a:ext cx="3119018" cy="2011680"/>
+            <a:off x="3607993" y="3566160"/>
+            <a:ext cx="2190673" cy="2011680"/>
           </a:xfrm>
           <a:prstGeom prst="rect">
             <a:avLst/>
@@ -4715,7 +4644,7 @@
           <a:p>
             <a:pPr algn="l"/>
             <a:r>
-              <a:rPr sz="2400" b="0">
+              <a:rPr sz="2000" b="0">
                 <a:solidFill>
                   <a:srgbClr val="222B27"/>
                 </a:solidFill>
@@ -4734,8 +4663,8 @@
         </p:nvSpPr>
         <p:spPr>
           <a:xfrm>
-            <a:off x="8066836" y="3337560"/>
-            <a:ext cx="3484778" cy="2377440"/>
+            <a:off x="6210146" y="3337560"/>
+            <a:ext cx="2556433" cy="2377440"/>
           </a:xfrm>
           <a:prstGeom prst="roundRect">
             <a:avLst/>
@@ -4778,8 +4707,8 @@
         </p:nvSpPr>
         <p:spPr>
           <a:xfrm>
-            <a:off x="8066836" y="3337560"/>
-            <a:ext cx="3484778" cy="109728"/>
+            <a:off x="6210146" y="3337560"/>
+            <a:ext cx="2556433" cy="109728"/>
           </a:xfrm>
           <a:prstGeom prst="rect">
             <a:avLst/>
@@ -4822,8 +4751,8 @@
         </p:nvSpPr>
         <p:spPr>
           <a:xfrm>
-            <a:off x="8249716" y="3566160"/>
-            <a:ext cx="3119018" cy="2011680"/>
+            <a:off x="6393026" y="3566160"/>
+            <a:ext cx="2190673" cy="2011680"/>
           </a:xfrm>
           <a:prstGeom prst="rect">
             <a:avLst/>
@@ -4838,7 +4767,7 @@
           <a:p>
             <a:pPr algn="l"/>
             <a:r>
-              <a:rPr sz="2400" b="0">
+              <a:rPr sz="2000" b="0">
                 <a:solidFill>
                   <a:srgbClr val="222B27"/>
                 </a:solidFill>
@@ -4851,7 +4780,130 @@
       </p:sp>
       <p:sp>
         <p:nvSpPr>
-          <p:cNvPr id="15" name="TextBox 14"/>
+          <p:cNvPr id="15" name="Rounded Rectangle 14"/>
+          <p:cNvSpPr/>
+          <p:nvPr/>
+        </p:nvSpPr>
+        <p:spPr>
+          <a:xfrm>
+            <a:off x="8995179" y="3337560"/>
+            <a:ext cx="2556433" cy="2377440"/>
+          </a:xfrm>
+          <a:prstGeom prst="roundRect">
+            <a:avLst/>
+          </a:prstGeom>
+          <a:solidFill>
+            <a:srgbClr val="FFFFFF"/>
+          </a:solidFill>
+          <a:ln>
+            <a:noFill/>
+          </a:ln>
+          <a:effectLst/>
+        </p:spPr>
+        <p:style>
+          <a:lnRef idx="1">
+            <a:schemeClr val="accent1"/>
+          </a:lnRef>
+          <a:fillRef idx="3">
+            <a:schemeClr val="accent1"/>
+          </a:fillRef>
+          <a:effectRef idx="2">
+            <a:schemeClr val="accent1"/>
+          </a:effectRef>
+          <a:fontRef idx="minor">
+            <a:schemeClr val="lt1"/>
+          </a:fontRef>
+        </p:style>
+        <p:txBody>
+          <a:bodyPr rtlCol="0" anchor="ctr"/>
+          <a:lstStyle/>
+          <a:p>
+            <a:pPr algn="ctr"/>
+          </a:p>
+        </p:txBody>
+      </p:sp>
+      <p:sp>
+        <p:nvSpPr>
+          <p:cNvPr id="16" name="Rectangle 15"/>
+          <p:cNvSpPr/>
+          <p:nvPr/>
+        </p:nvSpPr>
+        <p:spPr>
+          <a:xfrm>
+            <a:off x="8995179" y="3337560"/>
+            <a:ext cx="2556433" cy="109728"/>
+          </a:xfrm>
+          <a:prstGeom prst="rect">
+            <a:avLst/>
+          </a:prstGeom>
+          <a:solidFill>
+            <a:srgbClr val="E8833A"/>
+          </a:solidFill>
+          <a:ln>
+            <a:noFill/>
+          </a:ln>
+          <a:effectLst/>
+        </p:spPr>
+        <p:style>
+          <a:lnRef idx="1">
+            <a:schemeClr val="accent1"/>
+          </a:lnRef>
+          <a:fillRef idx="3">
+            <a:schemeClr val="accent1"/>
+          </a:fillRef>
+          <a:effectRef idx="2">
+            <a:schemeClr val="accent1"/>
+          </a:effectRef>
+          <a:fontRef idx="minor">
+            <a:schemeClr val="lt1"/>
+          </a:fontRef>
+        </p:style>
+        <p:txBody>
+          <a:bodyPr rtlCol="0" anchor="ctr"/>
+          <a:lstStyle/>
+          <a:p>
+            <a:pPr algn="ctr"/>
+          </a:p>
+        </p:txBody>
+      </p:sp>
+      <p:sp>
+        <p:nvSpPr>
+          <p:cNvPr id="17" name="TextBox 16"/>
+          <p:cNvSpPr txBox="1"/>
+          <p:nvPr/>
+        </p:nvSpPr>
+        <p:spPr>
+          <a:xfrm>
+            <a:off x="9178059" y="3566160"/>
+            <a:ext cx="2190673" cy="2011680"/>
+          </a:xfrm>
+          <a:prstGeom prst="rect">
+            <a:avLst/>
+          </a:prstGeom>
+          <a:noFill/>
+        </p:spPr>
+        <p:txBody>
+          <a:bodyPr wrap="square" anchor="ctr">
+            <a:spAutoFit/>
+          </a:bodyPr>
+          <a:lstStyle/>
+          <a:p>
+            <a:pPr algn="l"/>
+            <a:r>
+              <a:rPr sz="2000" b="0">
+                <a:solidFill>
+                  <a:srgbClr val="222B27"/>
+                </a:solidFill>
+                <a:latin typeface="Calibri"/>
+              </a:rPr>
+              <a:t>Ce qu’on a entendu : [À REMPLIR VENDREDI MATIN]</a:t>
+            </a:r>
+          </a:p>
+        </p:txBody>
+      </p:sp>
+      <p:sp>
+        <p:nvSpPr>
+          <p:cNvPr id="18" name="TextBox 17"/>
           <p:cNvSpPr txBox="1"/>
           <p:nvPr/>
         </p:nvSpPr>
@@ -4886,7 +4938,7 @@
       </p:sp>
       <p:sp>
         <p:nvSpPr>
-          <p:cNvPr id="16" name="TextBox 15"/>
+          <p:cNvPr id="19" name="TextBox 18"/>
           <p:cNvSpPr txBox="1"/>
           <p:nvPr/>
         </p:nvSpPr>
@@ -5273,7 +5325,7 @@
                 </a:solidFill>
                 <a:latin typeface="Calibri"/>
               </a:rPr>
-              <a:t>Ce que la démo montre</a:t>
+              <a:t>Technologies, outils et données utilisés</a:t>
             </a:r>
           </a:p>
         </p:txBody>
@@ -5352,7 +5404,7 @@
                 </a:solidFill>
                 <a:latin typeface="Calibri"/>
               </a:rPr>
-              <a:t>Commerçant, besoin, proposition à trois (87 %), Ça m’intéresse, projet confirmé (simulé).</a:t>
+              <a:t>Personne ne commence avec une page blanche.</a:t>
             </a:r>
           </a:p>
         </p:txBody>
@@ -5475,7 +5527,7 @@
                 </a:solidFill>
                 <a:latin typeface="Calibri"/>
               </a:rPr>
-              <a:t>Commerçant</a:t>
+              <a:t>React, Vite, TypeScript, MapLibre</a:t>
             </a:r>
           </a:p>
         </p:txBody>
@@ -5598,7 +5650,7 @@
                 </a:solidFill>
                 <a:latin typeface="Calibri"/>
               </a:rPr>
-              <a:t>Besoin</a:t>
+              <a:t>GitHub Pages, Claude Code</a:t>
             </a:r>
           </a:p>
         </p:txBody>
@@ -5721,7 +5773,7 @@
                 </a:solidFill>
                 <a:latin typeface="Calibri"/>
               </a:rPr>
-              <a:t>Proposition à trois</a:t>
+              <a:t>386 membres (fichier fourni par la SDC)</a:t>
             </a:r>
           </a:p>
         </p:txBody>
@@ -5844,7 +5896,7 @@
                 </a:solidFill>
                 <a:latin typeface="Calibri"/>
               </a:rPr>
-              <a:t>Ça m’intéresse</a:t>
+              <a:t>614 organismes reconnus (toute la ville)</a:t>
             </a:r>
           </a:p>
         </p:txBody>
@@ -5967,7 +6019,7 @@
                 </a:solidFill>
                 <a:latin typeface="Calibri"/>
               </a:rPr>
-              <a:t>Confirmé (simulé)</a:t>
+              <a:t>Données Québec, CC BY 4.0</a:t>
             </a:r>
           </a:p>
         </p:txBody>
@@ -6142,7 +6194,7 @@
                 </a:solidFill>
                 <a:latin typeface="Calibri"/>
               </a:rPr>
-              <a:t>Technologies, outils et données utilisés</a:t>
+              <a:t>Transparence : un moteur de règles, l’IA en phase 2</a:t>
             </a:r>
           </a:p>
         </p:txBody>
@@ -6221,7 +6273,7 @@
                 </a:solidFill>
                 <a:latin typeface="Calibri"/>
               </a:rPr>
-              <a:t>Personne ne commence avec une page blanche.</a:t>
+              <a:t>On l’a testé, on a choisi des règles pour que chaque suggestion s’explique.</a:t>
             </a:r>
           </a:p>
         </p:txBody>
@@ -6235,7 +6287,7 @@
         <p:spPr>
           <a:xfrm>
             <a:off x="640080" y="3337560"/>
-            <a:ext cx="2556433" cy="2377440"/>
+            <a:ext cx="3484778" cy="2377440"/>
           </a:xfrm>
           <a:prstGeom prst="roundRect">
             <a:avLst/>
@@ -6279,7 +6331,7 @@
         <p:spPr>
           <a:xfrm>
             <a:off x="640080" y="3337560"/>
-            <a:ext cx="2556433" cy="109728"/>
+            <a:ext cx="3484778" cy="109728"/>
           </a:xfrm>
           <a:prstGeom prst="rect">
             <a:avLst/>
@@ -6323,7 +6375,7 @@
         <p:spPr>
           <a:xfrm>
             <a:off x="822960" y="3566160"/>
-            <a:ext cx="2190673" cy="2011680"/>
+            <a:ext cx="3119018" cy="2011680"/>
           </a:xfrm>
           <a:prstGeom prst="rect">
             <a:avLst/>
@@ -6338,13 +6390,13 @@
           <a:p>
             <a:pPr algn="l"/>
             <a:r>
-              <a:rPr sz="2000" b="0">
+              <a:rPr sz="2400" b="0">
                 <a:solidFill>
                   <a:srgbClr val="222B27"/>
                 </a:solidFill>
                 <a:latin typeface="Calibri"/>
               </a:rPr>
-              <a:t>Vite, React, TypeScript, MapLibre</a:t>
+              <a:t>Règles visibles</a:t>
             </a:r>
           </a:p>
         </p:txBody>
@@ -6357,8 +6409,8 @@
         </p:nvSpPr>
         <p:spPr>
           <a:xfrm>
-            <a:off x="3425113" y="3337560"/>
-            <a:ext cx="2556433" cy="2377440"/>
+            <a:off x="4353458" y="3337560"/>
+            <a:ext cx="3484778" cy="2377440"/>
           </a:xfrm>
           <a:prstGeom prst="roundRect">
             <a:avLst/>
@@ -6401,8 +6453,8 @@
         </p:nvSpPr>
         <p:spPr>
           <a:xfrm>
-            <a:off x="3425113" y="3337560"/>
-            <a:ext cx="2556433" cy="109728"/>
+            <a:off x="4353458" y="3337560"/>
+            <a:ext cx="3484778" cy="109728"/>
           </a:xfrm>
           <a:prstGeom prst="rect">
             <a:avLst/>
@@ -6445,8 +6497,8 @@
         </p:nvSpPr>
         <p:spPr>
           <a:xfrm>
-            <a:off x="3607993" y="3566160"/>
-            <a:ext cx="2190673" cy="2011680"/>
+            <a:off x="4536338" y="3566160"/>
+            <a:ext cx="3119018" cy="2011680"/>
           </a:xfrm>
           <a:prstGeom prst="rect">
             <a:avLst/>
@@ -6461,13 +6513,13 @@
           <a:p>
             <a:pPr algn="l"/>
             <a:r>
-              <a:rPr sz="2000" b="0">
+              <a:rPr sz="2400" b="0">
                 <a:solidFill>
                   <a:srgbClr val="222B27"/>
                 </a:solidFill>
                 <a:latin typeface="Calibri"/>
               </a:rPr>
-              <a:t>OpenFreeMap, OpenStreetMap, Vercel, GitHub, Claude Code</a:t>
+              <a:t>Score pondéré visible</a:t>
             </a:r>
           </a:p>
         </p:txBody>
@@ -6480,8 +6532,8 @@
         </p:nvSpPr>
         <p:spPr>
           <a:xfrm>
-            <a:off x="6210146" y="3337560"/>
-            <a:ext cx="2556433" cy="2377440"/>
+            <a:off x="8066836" y="3337560"/>
+            <a:ext cx="3484778" cy="2377440"/>
           </a:xfrm>
           <a:prstGeom prst="roundRect">
             <a:avLst/>
@@ -6524,8 +6576,8 @@
         </p:nvSpPr>
         <p:spPr>
           <a:xfrm>
-            <a:off x="6210146" y="3337560"/>
-            <a:ext cx="2556433" cy="109728"/>
+            <a:off x="8066836" y="3337560"/>
+            <a:ext cx="3484778" cy="109728"/>
           </a:xfrm>
           <a:prstGeom prst="rect">
             <a:avLst/>
@@ -6568,8 +6620,8 @@
         </p:nvSpPr>
         <p:spPr>
           <a:xfrm>
-            <a:off x="6393026" y="3566160"/>
-            <a:ext cx="2190673" cy="2011680"/>
+            <a:off x="8249716" y="3566160"/>
+            <a:ext cx="3119018" cy="2011680"/>
           </a:xfrm>
           <a:prstGeom prst="rect">
             <a:avLst/>
@@ -6584,143 +6636,20 @@
           <a:p>
             <a:pPr algn="l"/>
             <a:r>
-              <a:rPr sz="2000" b="0">
+              <a:rPr sz="2400" b="0">
                 <a:solidFill>
                   <a:srgbClr val="222B27"/>
                 </a:solidFill>
                 <a:latin typeface="Calibri"/>
               </a:rPr>
-              <a:t>Répertoires de la Ville (structure seulement) : 614 organismes reconnus, 337 soutenus, 487 entreprises, 386 membres SDC, 1 960 installations, 379 événements</a:t>
-            </a:r>
-          </a:p>
-        </p:txBody>
-      </p:sp>
-      <p:sp>
-        <p:nvSpPr>
-          <p:cNvPr id="15" name="Rounded Rectangle 14"/>
-          <p:cNvSpPr/>
-          <p:nvPr/>
-        </p:nvSpPr>
-        <p:spPr>
-          <a:xfrm>
-            <a:off x="8995179" y="3337560"/>
-            <a:ext cx="2556433" cy="2377440"/>
-          </a:xfrm>
-          <a:prstGeom prst="roundRect">
-            <a:avLst/>
-          </a:prstGeom>
-          <a:solidFill>
-            <a:srgbClr val="FFFFFF"/>
-          </a:solidFill>
-          <a:ln>
-            <a:noFill/>
-          </a:ln>
-          <a:effectLst/>
-        </p:spPr>
-        <p:style>
-          <a:lnRef idx="1">
-            <a:schemeClr val="accent1"/>
-          </a:lnRef>
-          <a:fillRef idx="3">
-            <a:schemeClr val="accent1"/>
-          </a:fillRef>
-          <a:effectRef idx="2">
-            <a:schemeClr val="accent1"/>
-          </a:effectRef>
-          <a:fontRef idx="minor">
-            <a:schemeClr val="lt1"/>
-          </a:fontRef>
-        </p:style>
-        <p:txBody>
-          <a:bodyPr rtlCol="0" anchor="ctr"/>
-          <a:lstStyle/>
-          <a:p>
-            <a:pPr algn="ctr"/>
-          </a:p>
-        </p:txBody>
-      </p:sp>
-      <p:sp>
-        <p:nvSpPr>
-          <p:cNvPr id="16" name="Rectangle 15"/>
-          <p:cNvSpPr/>
-          <p:nvPr/>
-        </p:nvSpPr>
-        <p:spPr>
-          <a:xfrm>
-            <a:off x="8995179" y="3337560"/>
-            <a:ext cx="2556433" cy="109728"/>
-          </a:xfrm>
-          <a:prstGeom prst="rect">
-            <a:avLst/>
-          </a:prstGeom>
-          <a:solidFill>
-            <a:srgbClr val="E8833A"/>
-          </a:solidFill>
-          <a:ln>
-            <a:noFill/>
-          </a:ln>
-          <a:effectLst/>
-        </p:spPr>
-        <p:style>
-          <a:lnRef idx="1">
-            <a:schemeClr val="accent1"/>
-          </a:lnRef>
-          <a:fillRef idx="3">
-            <a:schemeClr val="accent1"/>
-          </a:fillRef>
-          <a:effectRef idx="2">
-            <a:schemeClr val="accent1"/>
-          </a:effectRef>
-          <a:fontRef idx="minor">
-            <a:schemeClr val="lt1"/>
-          </a:fontRef>
-        </p:style>
-        <p:txBody>
-          <a:bodyPr rtlCol="0" anchor="ctr"/>
-          <a:lstStyle/>
-          <a:p>
-            <a:pPr algn="ctr"/>
-          </a:p>
-        </p:txBody>
-      </p:sp>
-      <p:sp>
-        <p:nvSpPr>
-          <p:cNvPr id="17" name="TextBox 16"/>
-          <p:cNvSpPr txBox="1"/>
-          <p:nvPr/>
-        </p:nvSpPr>
-        <p:spPr>
-          <a:xfrm>
-            <a:off x="9178059" y="3566160"/>
-            <a:ext cx="2190673" cy="2011680"/>
-          </a:xfrm>
-          <a:prstGeom prst="rect">
-            <a:avLst/>
-          </a:prstGeom>
-          <a:noFill/>
-        </p:spPr>
-        <p:txBody>
-          <a:bodyPr wrap="square" anchor="ctr">
-            <a:spAutoFit/>
-          </a:bodyPr>
-          <a:lstStyle/>
-          <a:p>
-            <a:pPr algn="l"/>
-            <a:r>
-              <a:rPr sz="2000" b="0">
-                <a:solidFill>
-                  <a:srgbClr val="222B27"/>
-                </a:solidFill>
-                <a:latin typeface="Calibri"/>
-              </a:rPr>
-              <a:t>Données Québec ouvertes</a:t>
-            </a:r>
-          </a:p>
-        </p:txBody>
-      </p:sp>
-      <p:sp>
-        <p:nvSpPr>
-          <p:cNvPr id="18" name="TextBox 17"/>
+              <a:t>Phase 2 : l’IA lit la demande libre</a:t>
+            </a:r>
+          </a:p>
+        </p:txBody>
+      </p:sp>
+      <p:sp>
+        <p:nvSpPr>
+          <p:cNvPr id="15" name="TextBox 14"/>
           <p:cNvSpPr txBox="1"/>
           <p:nvPr/>
         </p:nvSpPr>
@@ -6755,7 +6684,7 @@
       </p:sp>
       <p:sp>
         <p:nvSpPr>
-          <p:cNvPr id="19" name="TextBox 18"/>
+          <p:cNvPr id="16" name="TextBox 15"/>
           <p:cNvSpPr txBox="1"/>
           <p:nvPr/>
         </p:nvSpPr>
@@ -6888,7 +6817,7 @@
                 </a:solidFill>
                 <a:latin typeface="Calibri"/>
               </a:rPr>
-              <a:t>Transparence : un moteur de règles, l’IA en phase 2</a:t>
+              <a:t>Impact et feuille de route</a:t>
             </a:r>
           </a:p>
         </p:txBody>
@@ -6967,7 +6896,7 @@
                 </a:solidFill>
                 <a:latin typeface="Calibri"/>
               </a:rPr>
-              <a:t>On l’a testé, on a choisi des règles pour que chaque suggestion s’explique.</a:t>
+              <a:t>Un pilote avec la SDC, puis tout Saint-Roch.</a:t>
             </a:r>
           </a:p>
         </p:txBody>
@@ -7090,7 +7019,7 @@
                 </a:solidFill>
                 <a:latin typeface="Calibri"/>
               </a:rPr>
-              <a:t>Règles visibles</a:t>
+              <a:t>Maintenant : démo simulée, fil local</a:t>
             </a:r>
           </a:p>
         </p:txBody>
@@ -7213,7 +7142,7 @@
                 </a:solidFill>
                 <a:latin typeface="Calibri"/>
               </a:rPr>
-              <a:t>Score pondéré visible</a:t>
+              <a:t>Pilote : vraie invitation, fil partagé modéré par la SDC</a:t>
             </a:r>
           </a:p>
         </p:txBody>
@@ -7336,7 +7265,7 @@
                 </a:solidFill>
                 <a:latin typeface="Calibri"/>
               </a:rPr>
-              <a:t>Phase 2 : l’IA lit la demande libre</a:t>
+              <a:t>Plus tard : IA, autres quartiers</a:t>
             </a:r>
           </a:p>
         </p:txBody>
@@ -7511,7 +7440,7 @@
                 </a:solidFill>
                 <a:latin typeface="Calibri"/>
               </a:rPr>
-              <a:t>Impact et feuille de route</a:t>
+              <a:t>Conclusion</a:t>
             </a:r>
           </a:p>
         </p:txBody>
@@ -7590,117 +7519,29 @@
                 </a:solidFill>
                 <a:latin typeface="Calibri"/>
               </a:rPr>
-              <a:t>Un pilote avec la SDC, puis tout Saint-Roch.</a:t>
-            </a:r>
-          </a:p>
-        </p:txBody>
-      </p:sp>
-      <p:sp>
-        <p:nvSpPr>
-          <p:cNvPr id="6" name="Rounded Rectangle 5"/>
-          <p:cNvSpPr/>
+              <a:t>Saint-Roch a déjà tout ce qu’il faut. Maillage aide ses voisins à se trouver.</a:t>
+            </a:r>
+          </a:p>
+        </p:txBody>
+      </p:sp>
+      <p:sp>
+        <p:nvSpPr>
+          <p:cNvPr id="6" name="TextBox 5"/>
+          <p:cNvSpPr txBox="1"/>
           <p:nvPr/>
         </p:nvSpPr>
         <p:spPr>
           <a:xfrm>
             <a:off x="640080" y="3337560"/>
-            <a:ext cx="3484778" cy="2377440"/>
-          </a:xfrm>
-          <a:prstGeom prst="roundRect">
-            <a:avLst/>
-          </a:prstGeom>
-          <a:solidFill>
-            <a:srgbClr val="FFFFFF"/>
-          </a:solidFill>
-          <a:ln>
-            <a:noFill/>
-          </a:ln>
-          <a:effectLst/>
-        </p:spPr>
-        <p:style>
-          <a:lnRef idx="1">
-            <a:schemeClr val="accent1"/>
-          </a:lnRef>
-          <a:fillRef idx="3">
-            <a:schemeClr val="accent1"/>
-          </a:fillRef>
-          <a:effectRef idx="2">
-            <a:schemeClr val="accent1"/>
-          </a:effectRef>
-          <a:fontRef idx="minor">
-            <a:schemeClr val="lt1"/>
-          </a:fontRef>
-        </p:style>
-        <p:txBody>
-          <a:bodyPr rtlCol="0" anchor="ctr"/>
-          <a:lstStyle/>
-          <a:p>
-            <a:pPr algn="ctr"/>
-          </a:p>
-        </p:txBody>
-      </p:sp>
-      <p:sp>
-        <p:nvSpPr>
-          <p:cNvPr id="7" name="Rectangle 6"/>
-          <p:cNvSpPr/>
-          <p:nvPr/>
-        </p:nvSpPr>
-        <p:spPr>
-          <a:xfrm>
-            <a:off x="640080" y="3337560"/>
-            <a:ext cx="3484778" cy="109728"/>
+            <a:ext cx="10911535" cy="1371600"/>
           </a:xfrm>
           <a:prstGeom prst="rect">
             <a:avLst/>
           </a:prstGeom>
-          <a:solidFill>
-            <a:srgbClr val="E8833A"/>
-          </a:solidFill>
-          <a:ln>
-            <a:noFill/>
-          </a:ln>
-          <a:effectLst/>
-        </p:spPr>
-        <p:style>
-          <a:lnRef idx="1">
-            <a:schemeClr val="accent1"/>
-          </a:lnRef>
-          <a:fillRef idx="3">
-            <a:schemeClr val="accent1"/>
-          </a:fillRef>
-          <a:effectRef idx="2">
-            <a:schemeClr val="accent1"/>
-          </a:effectRef>
-          <a:fontRef idx="minor">
-            <a:schemeClr val="lt1"/>
-          </a:fontRef>
-        </p:style>
-        <p:txBody>
-          <a:bodyPr rtlCol="0" anchor="ctr"/>
-          <a:lstStyle/>
-          <a:p>
-            <a:pPr algn="ctr"/>
-          </a:p>
-        </p:txBody>
-      </p:sp>
-      <p:sp>
-        <p:nvSpPr>
-          <p:cNvPr id="8" name="TextBox 7"/>
-          <p:cNvSpPr txBox="1"/>
-          <p:nvPr/>
-        </p:nvSpPr>
-        <p:spPr>
-          <a:xfrm>
-            <a:off x="822960" y="3566160"/>
-            <a:ext cx="3119018" cy="2011680"/>
-          </a:xfrm>
-          <a:prstGeom prst="rect">
-            <a:avLst/>
-          </a:prstGeom>
           <a:noFill/>
         </p:spPr>
         <p:txBody>
-          <a:bodyPr wrap="square" anchor="ctr">
+          <a:bodyPr wrap="square" anchor="t">
             <a:spAutoFit/>
           </a:bodyPr>
           <a:lstStyle/>
@@ -7709,264 +7550,18 @@
             <a:r>
               <a:rPr sz="2400" b="0">
                 <a:solidFill>
-                  <a:srgbClr val="222B27"/>
+                  <a:srgbClr val="1F5F4A"/>
                 </a:solidFill>
                 <a:latin typeface="Calibri"/>
               </a:rPr>
-              <a:t>Maintenant : démo simulée</a:t>
-            </a:r>
-          </a:p>
-        </p:txBody>
-      </p:sp>
-      <p:sp>
-        <p:nvSpPr>
-          <p:cNvPr id="9" name="Rounded Rectangle 8"/>
-          <p:cNvSpPr/>
-          <p:nvPr/>
-        </p:nvSpPr>
-        <p:spPr>
-          <a:xfrm>
-            <a:off x="4353458" y="3337560"/>
-            <a:ext cx="3484778" cy="2377440"/>
-          </a:xfrm>
-          <a:prstGeom prst="roundRect">
-            <a:avLst/>
-          </a:prstGeom>
-          <a:solidFill>
-            <a:srgbClr val="FFFFFF"/>
-          </a:solidFill>
-          <a:ln>
-            <a:noFill/>
-          </a:ln>
-          <a:effectLst/>
-        </p:spPr>
-        <p:style>
-          <a:lnRef idx="1">
-            <a:schemeClr val="accent1"/>
-          </a:lnRef>
-          <a:fillRef idx="3">
-            <a:schemeClr val="accent1"/>
-          </a:fillRef>
-          <a:effectRef idx="2">
-            <a:schemeClr val="accent1"/>
-          </a:effectRef>
-          <a:fontRef idx="minor">
-            <a:schemeClr val="lt1"/>
-          </a:fontRef>
-        </p:style>
-        <p:txBody>
-          <a:bodyPr rtlCol="0" anchor="ctr"/>
-          <a:lstStyle/>
-          <a:p>
-            <a:pPr algn="ctr"/>
-          </a:p>
-        </p:txBody>
-      </p:sp>
-      <p:sp>
-        <p:nvSpPr>
-          <p:cNvPr id="10" name="Rectangle 9"/>
-          <p:cNvSpPr/>
-          <p:nvPr/>
-        </p:nvSpPr>
-        <p:spPr>
-          <a:xfrm>
-            <a:off x="4353458" y="3337560"/>
-            <a:ext cx="3484778" cy="109728"/>
-          </a:xfrm>
-          <a:prstGeom prst="rect">
-            <a:avLst/>
-          </a:prstGeom>
-          <a:solidFill>
-            <a:srgbClr val="E8833A"/>
-          </a:solidFill>
-          <a:ln>
-            <a:noFill/>
-          </a:ln>
-          <a:effectLst/>
-        </p:spPr>
-        <p:style>
-          <a:lnRef idx="1">
-            <a:schemeClr val="accent1"/>
-          </a:lnRef>
-          <a:fillRef idx="3">
-            <a:schemeClr val="accent1"/>
-          </a:fillRef>
-          <a:effectRef idx="2">
-            <a:schemeClr val="accent1"/>
-          </a:effectRef>
-          <a:fontRef idx="minor">
-            <a:schemeClr val="lt1"/>
-          </a:fontRef>
-        </p:style>
-        <p:txBody>
-          <a:bodyPr rtlCol="0" anchor="ctr"/>
-          <a:lstStyle/>
-          <a:p>
-            <a:pPr algn="ctr"/>
-          </a:p>
-        </p:txBody>
-      </p:sp>
-      <p:sp>
-        <p:nvSpPr>
-          <p:cNvPr id="11" name="TextBox 10"/>
-          <p:cNvSpPr txBox="1"/>
-          <p:nvPr/>
-        </p:nvSpPr>
-        <p:spPr>
-          <a:xfrm>
-            <a:off x="4536338" y="3566160"/>
-            <a:ext cx="3119018" cy="2011680"/>
-          </a:xfrm>
-          <a:prstGeom prst="rect">
-            <a:avLst/>
-          </a:prstGeom>
-          <a:noFill/>
-        </p:spPr>
-        <p:txBody>
-          <a:bodyPr wrap="square" anchor="ctr">
-            <a:spAutoFit/>
-          </a:bodyPr>
-          <a:lstStyle/>
-          <a:p>
-            <a:pPr algn="l"/>
-            <a:r>
-              <a:rPr sz="2400" b="0">
-                <a:solidFill>
-                  <a:srgbClr val="222B27"/>
-                </a:solidFill>
-                <a:latin typeface="Calibri"/>
-              </a:rPr>
-              <a:t>Pilote : chaque partenaire reçoit l’invitation et accepte</a:t>
-            </a:r>
-          </a:p>
-        </p:txBody>
-      </p:sp>
-      <p:sp>
-        <p:nvSpPr>
-          <p:cNvPr id="12" name="Rounded Rectangle 11"/>
-          <p:cNvSpPr/>
-          <p:nvPr/>
-        </p:nvSpPr>
-        <p:spPr>
-          <a:xfrm>
-            <a:off x="8066836" y="3337560"/>
-            <a:ext cx="3484778" cy="2377440"/>
-          </a:xfrm>
-          <a:prstGeom prst="roundRect">
-            <a:avLst/>
-          </a:prstGeom>
-          <a:solidFill>
-            <a:srgbClr val="FFFFFF"/>
-          </a:solidFill>
-          <a:ln>
-            <a:noFill/>
-          </a:ln>
-          <a:effectLst/>
-        </p:spPr>
-        <p:style>
-          <a:lnRef idx="1">
-            <a:schemeClr val="accent1"/>
-          </a:lnRef>
-          <a:fillRef idx="3">
-            <a:schemeClr val="accent1"/>
-          </a:fillRef>
-          <a:effectRef idx="2">
-            <a:schemeClr val="accent1"/>
-          </a:effectRef>
-          <a:fontRef idx="minor">
-            <a:schemeClr val="lt1"/>
-          </a:fontRef>
-        </p:style>
-        <p:txBody>
-          <a:bodyPr rtlCol="0" anchor="ctr"/>
-          <a:lstStyle/>
-          <a:p>
-            <a:pPr algn="ctr"/>
-          </a:p>
-        </p:txBody>
-      </p:sp>
-      <p:sp>
-        <p:nvSpPr>
-          <p:cNvPr id="13" name="Rectangle 12"/>
-          <p:cNvSpPr/>
-          <p:nvPr/>
-        </p:nvSpPr>
-        <p:spPr>
-          <a:xfrm>
-            <a:off x="8066836" y="3337560"/>
-            <a:ext cx="3484778" cy="109728"/>
-          </a:xfrm>
-          <a:prstGeom prst="rect">
-            <a:avLst/>
-          </a:prstGeom>
-          <a:solidFill>
-            <a:srgbClr val="E8833A"/>
-          </a:solidFill>
-          <a:ln>
-            <a:noFill/>
-          </a:ln>
-          <a:effectLst/>
-        </p:spPr>
-        <p:style>
-          <a:lnRef idx="1">
-            <a:schemeClr val="accent1"/>
-          </a:lnRef>
-          <a:fillRef idx="3">
-            <a:schemeClr val="accent1"/>
-          </a:fillRef>
-          <a:effectRef idx="2">
-            <a:schemeClr val="accent1"/>
-          </a:effectRef>
-          <a:fontRef idx="minor">
-            <a:schemeClr val="lt1"/>
-          </a:fontRef>
-        </p:style>
-        <p:txBody>
-          <a:bodyPr rtlCol="0" anchor="ctr"/>
-          <a:lstStyle/>
-          <a:p>
-            <a:pPr algn="ctr"/>
-          </a:p>
-        </p:txBody>
-      </p:sp>
-      <p:sp>
-        <p:nvSpPr>
-          <p:cNvPr id="14" name="TextBox 13"/>
-          <p:cNvSpPr txBox="1"/>
-          <p:nvPr/>
-        </p:nvSpPr>
-        <p:spPr>
-          <a:xfrm>
-            <a:off x="8249716" y="3566160"/>
-            <a:ext cx="3119018" cy="2011680"/>
-          </a:xfrm>
-          <a:prstGeom prst="rect">
-            <a:avLst/>
-          </a:prstGeom>
-          <a:noFill/>
-        </p:spPr>
-        <p:txBody>
-          <a:bodyPr wrap="square" anchor="ctr">
-            <a:spAutoFit/>
-          </a:bodyPr>
-          <a:lstStyle/>
-          <a:p>
-            <a:pPr algn="l"/>
-            <a:r>
-              <a:rPr sz="2400" b="0">
-                <a:solidFill>
-                  <a:srgbClr val="222B27"/>
-                </a:solidFill>
-                <a:latin typeface="Calibri"/>
-              </a:rPr>
-              <a:t>Plus tard : IA, autres quartiers</a:t>
-            </a:r>
-          </a:p>
-        </p:txBody>
-      </p:sp>
-      <p:sp>
-        <p:nvSpPr>
-          <p:cNvPr id="15" name="TextBox 14"/>
+              <a:t>cianthiffault2006-png.github.io/hackathon-saint-roch-2026</a:t>
+            </a:r>
+          </a:p>
+        </p:txBody>
+      </p:sp>
+      <p:sp>
+        <p:nvSpPr>
+          <p:cNvPr id="7" name="TextBox 6"/>
           <p:cNvSpPr txBox="1"/>
           <p:nvPr/>
         </p:nvSpPr>
@@ -8001,7 +7596,7 @@
       </p:sp>
       <p:sp>
         <p:nvSpPr>
-          <p:cNvPr id="16" name="TextBox 15"/>
+          <p:cNvPr id="8" name="TextBox 7"/>
           <p:cNvSpPr txBox="1"/>
           <p:nvPr/>
         </p:nvSpPr>
@@ -8030,260 +7625,6 @@
                 <a:latin typeface="Calibri"/>
               </a:rPr>
               <a:t>7</a:t>
-            </a:r>
-          </a:p>
-        </p:txBody>
-      </p:sp>
-    </p:spTree>
-  </p:cSld>
-  <p:clrMapOvr>
-    <a:masterClrMapping/>
-  </p:clrMapOvr>
-</p:sld>
-</file>
-
-<file path=ppt/slides/slide8.xml><?xml version="1.0" encoding="utf-8"?>
-<p:sld xmlns:a="http://schemas.openxmlformats.org/drawingml/2006/main" xmlns:p="http://schemas.openxmlformats.org/presentationml/2006/main" xmlns:r="http://schemas.openxmlformats.org/officeDocument/2006/relationships">
-  <p:cSld>
-    <p:bg>
-      <p:bgPr>
-        <a:solidFill>
-          <a:srgbClr val="FAF7F0"/>
-        </a:solidFill>
-        <a:effectLst/>
-      </p:bgPr>
-    </p:bg>
-    <p:spTree>
-      <p:nvGrpSpPr>
-        <p:cNvPr id="1" name=""/>
-        <p:cNvGrpSpPr/>
-        <p:nvPr/>
-      </p:nvGrpSpPr>
-      <p:grpSpPr/>
-      <p:sp>
-        <p:nvSpPr>
-          <p:cNvPr id="2" name="Rectangle 1"/>
-          <p:cNvSpPr/>
-          <p:nvPr/>
-        </p:nvSpPr>
-        <p:spPr>
-          <a:xfrm>
-            <a:off x="0" y="0"/>
-            <a:ext cx="12191695" cy="1325880"/>
-          </a:xfrm>
-          <a:prstGeom prst="rect">
-            <a:avLst/>
-          </a:prstGeom>
-          <a:solidFill>
-            <a:srgbClr val="1F5F4A"/>
-          </a:solidFill>
-          <a:ln>
-            <a:noFill/>
-          </a:ln>
-          <a:effectLst/>
-        </p:spPr>
-        <p:style>
-          <a:lnRef idx="1">
-            <a:schemeClr val="accent1"/>
-          </a:lnRef>
-          <a:fillRef idx="3">
-            <a:schemeClr val="accent1"/>
-          </a:fillRef>
-          <a:effectRef idx="2">
-            <a:schemeClr val="accent1"/>
-          </a:effectRef>
-          <a:fontRef idx="minor">
-            <a:schemeClr val="lt1"/>
-          </a:fontRef>
-        </p:style>
-        <p:txBody>
-          <a:bodyPr rtlCol="0" anchor="ctr"/>
-          <a:lstStyle/>
-          <a:p>
-            <a:pPr algn="ctr"/>
-          </a:p>
-        </p:txBody>
-      </p:sp>
-      <p:sp>
-        <p:nvSpPr>
-          <p:cNvPr id="3" name="TextBox 2"/>
-          <p:cNvSpPr txBox="1"/>
-          <p:nvPr/>
-        </p:nvSpPr>
-        <p:spPr>
-          <a:xfrm>
-            <a:off x="640080" y="182880"/>
-            <a:ext cx="10911535" cy="960120"/>
-          </a:xfrm>
-          <a:prstGeom prst="rect">
-            <a:avLst/>
-          </a:prstGeom>
-          <a:noFill/>
-        </p:spPr>
-        <p:txBody>
-          <a:bodyPr wrap="square" anchor="ctr">
-            <a:spAutoFit/>
-          </a:bodyPr>
-          <a:lstStyle/>
-          <a:p>
-            <a:pPr algn="l"/>
-            <a:r>
-              <a:rPr sz="4000" b="1">
-                <a:solidFill>
-                  <a:srgbClr val="FFFFFF"/>
-                </a:solidFill>
-                <a:latin typeface="Calibri"/>
-              </a:rPr>
-              <a:t>Conclusion</a:t>
-            </a:r>
-          </a:p>
-        </p:txBody>
-      </p:sp>
-      <p:sp>
-        <p:nvSpPr>
-          <p:cNvPr id="4" name="Rectangle 3"/>
-          <p:cNvSpPr/>
-          <p:nvPr/>
-        </p:nvSpPr>
-        <p:spPr>
-          <a:xfrm>
-            <a:off x="0" y="1325880"/>
-            <a:ext cx="12191695" cy="64008"/>
-          </a:xfrm>
-          <a:prstGeom prst="rect">
-            <a:avLst/>
-          </a:prstGeom>
-          <a:solidFill>
-            <a:srgbClr val="E8833A"/>
-          </a:solidFill>
-          <a:ln>
-            <a:noFill/>
-          </a:ln>
-          <a:effectLst/>
-        </p:spPr>
-        <p:style>
-          <a:lnRef idx="1">
-            <a:schemeClr val="accent1"/>
-          </a:lnRef>
-          <a:fillRef idx="3">
-            <a:schemeClr val="accent1"/>
-          </a:fillRef>
-          <a:effectRef idx="2">
-            <a:schemeClr val="accent1"/>
-          </a:effectRef>
-          <a:fontRef idx="minor">
-            <a:schemeClr val="lt1"/>
-          </a:fontRef>
-        </p:style>
-        <p:txBody>
-          <a:bodyPr rtlCol="0" anchor="ctr"/>
-          <a:lstStyle/>
-          <a:p>
-            <a:pPr algn="ctr"/>
-          </a:p>
-        </p:txBody>
-      </p:sp>
-      <p:sp>
-        <p:nvSpPr>
-          <p:cNvPr id="5" name="TextBox 4"/>
-          <p:cNvSpPr txBox="1"/>
-          <p:nvPr/>
-        </p:nvSpPr>
-        <p:spPr>
-          <a:xfrm>
-            <a:off x="640080" y="1783080"/>
-            <a:ext cx="10911535" cy="1371600"/>
-          </a:xfrm>
-          <a:prstGeom prst="rect">
-            <a:avLst/>
-          </a:prstGeom>
-          <a:noFill/>
-        </p:spPr>
-        <p:txBody>
-          <a:bodyPr wrap="square" anchor="t">
-            <a:spAutoFit/>
-          </a:bodyPr>
-          <a:lstStyle/>
-          <a:p>
-            <a:pPr algn="l"/>
-            <a:r>
-              <a:rPr sz="3400" b="1">
-                <a:solidFill>
-                  <a:srgbClr val="222B27"/>
-                </a:solidFill>
-                <a:latin typeface="Calibri"/>
-              </a:rPr>
-              <a:t>Saint-Roch a déjà tout ce qu’il faut. Maillage aide ses voisins à se trouver.</a:t>
-            </a:r>
-          </a:p>
-        </p:txBody>
-      </p:sp>
-      <p:sp>
-        <p:nvSpPr>
-          <p:cNvPr id="6" name="TextBox 5"/>
-          <p:cNvSpPr txBox="1"/>
-          <p:nvPr/>
-        </p:nvSpPr>
-        <p:spPr>
-          <a:xfrm>
-            <a:off x="640080" y="6400800"/>
-            <a:ext cx="7315200" cy="320040"/>
-          </a:xfrm>
-          <a:prstGeom prst="rect">
-            <a:avLst/>
-          </a:prstGeom>
-          <a:noFill/>
-        </p:spPr>
-        <p:txBody>
-          <a:bodyPr wrap="square" anchor="t">
-            <a:spAutoFit/>
-          </a:bodyPr>
-          <a:lstStyle/>
-          <a:p>
-            <a:pPr algn="l"/>
-            <a:r>
-              <a:rPr sz="1200" b="0">
-                <a:solidFill>
-                  <a:srgbClr val="1F5F4A"/>
-                </a:solidFill>
-                <a:latin typeface="Calibri"/>
-              </a:rPr>
-              <a:t>Équipe 14 · Maillage</a:t>
-            </a:r>
-          </a:p>
-        </p:txBody>
-      </p:sp>
-      <p:sp>
-        <p:nvSpPr>
-          <p:cNvPr id="7" name="TextBox 6"/>
-          <p:cNvSpPr txBox="1"/>
-          <p:nvPr/>
-        </p:nvSpPr>
-        <p:spPr>
-          <a:xfrm>
-            <a:off x="10637215" y="6400800"/>
-            <a:ext cx="914400" cy="320040"/>
-          </a:xfrm>
-          <a:prstGeom prst="rect">
-            <a:avLst/>
-          </a:prstGeom>
-          <a:noFill/>
-        </p:spPr>
-        <p:txBody>
-          <a:bodyPr wrap="square" anchor="t">
-            <a:spAutoFit/>
-          </a:bodyPr>
-          <a:lstStyle/>
-          <a:p>
-            <a:pPr algn="r"/>
-            <a:r>
-              <a:rPr sz="1200" b="0">
-                <a:solidFill>
-                  <a:srgbClr val="1F5F4A"/>
-                </a:solidFill>
-                <a:latin typeface="Calibri"/>
-              </a:rPr>
-              <a:t>8</a:t>
             </a:r>
           </a:p>
         </p:txBody>

--- a/docs/pitch/Maillage.pptx
+++ b/docs/pitch/Maillage.pptx
@@ -758,7 +758,7 @@
           </a:p>
           <a:p>
             <a:r>
-              <a:t>Signal [CIAN] : dire « Maillage part des répertoires qui existent déjà : les 386 membres du fichier fourni par la SDC, et 614 organismes reconnus à l’échelle de la ville. Personne ne commence avec une page blanche. » Puis la Loi 25 : « les personnes restent cachées; les commerces et organismes apparaissent avec leur nom public seulement, sans coordonnées, étiquetés pré-remplis, jusqu’à activation ». Nos règles s’appuient aussi sur le Plan d’action Saint-Roch. (35 s)</a:t>
+              <a:t>Signal [CIAN] : dire « Maillage part des répertoires qui existent déjà : les 386 membres du fichier fourni par la SDC, et 614 organismes reconnus à l’échelle de la ville. Personne ne commence avec une page blanche. » Puis la Loi 25 : « les personnes restent cachées; les commerces et organismes apparaissent avec leur nom, leur type, une description et une position approximative, sans coordonnées, étiquetés pré-remplis, jusqu’à activation ». Nos règles s’appuient aussi sur le Plan d’action Saint-Roch. (35 s)</a:t>
             </a:r>
           </a:p>
         </p:txBody>
@@ -833,7 +833,7 @@
           </a:p>
           <a:p>
             <a:r>
-              <a:t>Signal [COÉQUIPIÈRE] : verdict d’abord : on l’a testé, on a choisi des règles pour que chaque suggestion s’explique. Chiffres du test seulement si le jury demande. (20 s)</a:t>
+              <a:t>Signal [COÉQUIPIÈRE] : verdict d’abord : on l’a testée, on a choisi des règles pour que chaque suggestion s’explique. Chiffres du test seulement si le jury demande. (20 s)</a:t>
             </a:r>
           </a:p>
         </p:txBody>
@@ -6273,7 +6273,7 @@
                 </a:solidFill>
                 <a:latin typeface="Calibri"/>
               </a:rPr>
-              <a:t>On l’a testé, on a choisi des règles pour que chaque suggestion s’explique.</a:t>
+              <a:t>On l’a testée, on a choisi des règles pour que chaque suggestion s’explique.</a:t>
             </a:r>
           </a:p>
         </p:txBody>

--- a/docs/pitch/Maillage.pptx
+++ b/docs/pitch/Maillage.pptx
@@ -758,7 +758,7 @@
           </a:p>
           <a:p>
             <a:r>
-              <a:t>Signal [CIAN] : dire « Maillage part des répertoires qui existent déjà : les 386 membres du fichier fourni par la SDC, et 614 organismes reconnus à l’échelle de la ville. Personne ne commence avec une page blanche. » Puis la Loi 25 : « les personnes restent cachées; les commerces et organismes apparaissent avec leur nom, leur type, une description et une position approximative, sans coordonnées, étiquetés pré-remplis, jusqu’à activation ». Nos règles s’appuient aussi sur le Plan d’action Saint-Roch. (35 s)</a:t>
+              <a:t>Signal [CIAN] : dire « Maillage part des répertoires qui existent déjà : les 386 membres du fichier fourni par la SDC, et 614 organismes reconnus à l’échelle de la ville. Personne ne commence avec une page blanche. » Puis la Loi 25 : « les personnes restent cachées; les commerces et organismes apparaissent avec leur nom, leur type, une description et leur emplacement sur la carte, sans coordonnées, étiquetés pré-remplis, jusqu’à activation ». Nos règles s’appuient aussi sur le Plan d’action Saint-Roch. (35 s)</a:t>
             </a:r>
           </a:p>
         </p:txBody>

--- a/docs/pitch/Maillage.pptx
+++ b/docs/pitch/Maillage.pptx
@@ -758,7 +758,7 @@
           </a:p>
           <a:p>
             <a:r>
-              <a:t>Signal [CIAN] : dire « Maillage part des répertoires qui existent déjà : les 386 membres du fichier fourni par la SDC, et 614 organismes reconnus à l’échelle de la ville. Personne ne commence avec une page blanche. » Puis la Loi 25 : « les personnes restent cachées; les commerces et organismes apparaissent avec leur nom, leur type, une description et leur emplacement sur la carte, sans coordonnées, étiquetés pré-remplis, jusqu’à activation ». Nos règles s’appuient aussi sur le Plan d’action Saint-Roch. (35 s)</a:t>
+              <a:t>Signal [CIAN] : dire « Maillage part des répertoires qui existent déjà : les 386 membres du fichier fourni par la SDC, et 614 organismes reconnus à l’échelle de la ville. Personne ne commence avec une page blanche. » Puis la Loi 25 : « Pour la Loi 25, le consentement décide. Ces répertoires pré-remplissent les fiches; une fiche devient publique seulement si son responsable la réclame, avec un code envoyé à l’adresse que la SDC ou la Ville a déjà, et consent. Sinon, seule la SDC la voit. La démo montre des fiches fictives, marquées pré-rempli. » Nos règles s’appuient aussi sur le Plan d’action Saint-Roch. (38 s)</a:t>
             </a:r>
           </a:p>
         </p:txBody>
@@ -828,7 +828,7 @@
           <a:lstStyle/>
           <a:p>
             <a:r>
-              <a:t>Visuel : une carte de proposition avec « Pourquoi cette suggestion » et « À confirmer » surlignés; en bas, en petit : « Chaque suggestion s’explique. » Notes du test d’IA (pas sur la diapo, à voix haute seulement si on veut) : « Modèle multilingue dans le navigateur, gratuit, texte sur l’appareil (page /labo/) : 69 s au premier chargement (129 Mo), 13 s ensuite, 0,3 à 0,6 s par phrase. Trouve des profils semblables, pas complémentaires. »</a:t>
+              <a:t>Visuel : une carte de proposition avec « Pourquoi cette suggestion » et « À confirmer » surlignés; en bas, en petit : « Chaque suggestion s’explique. » Notes du test d’IA (pas sur la diapo, à voix haute seulement si on veut) : « Modèle multilingue dans le navigateur, gratuit, texte sur l’appareil (page /labo/) : 69 s au premier chargement (129 Mo), 13 s ensuite, 0,3 à 0,6 s par phrase. Trouve des profils semblables, pas complémentaires. » Ce modèle (paraphrase-multilingual-MiniLM) est multilingue. Déjà dans l’app : tolérance aux fautes, aux accents oubliés et à quelques mots d’anglais. Pas d’IA payante aujourd’hui; en phase 2, celui qui déploie la paie.</a:t>
             </a:r>
           </a:p>
           <a:p>
@@ -5527,7 +5527,7 @@
                 </a:solidFill>
                 <a:latin typeface="Calibri"/>
               </a:rPr>
-              <a:t>React, Vite, TypeScript, MapLibre</a:t>
+              <a:t>React, Vite, TypeScript, MapLibre, GitHub Pages, Claude Code</a:t>
             </a:r>
           </a:p>
         </p:txBody>
@@ -5650,7 +5650,7 @@
                 </a:solidFill>
                 <a:latin typeface="Calibri"/>
               </a:rPr>
-              <a:t>GitHub Pages, Claude Code</a:t>
+              <a:t>386 membres (fichier fourni par la SDC)</a:t>
             </a:r>
           </a:p>
         </p:txBody>
@@ -5773,7 +5773,7 @@
                 </a:solidFill>
                 <a:latin typeface="Calibri"/>
               </a:rPr>
-              <a:t>386 membres (fichier fourni par la SDC)</a:t>
+              <a:t>614 organismes reconnus (toute la ville)</a:t>
             </a:r>
           </a:p>
         </p:txBody>
@@ -5896,7 +5896,7 @@
                 </a:solidFill>
                 <a:latin typeface="Calibri"/>
               </a:rPr>
-              <a:t>614 organismes reconnus (toute la ville)</a:t>
+              <a:t>Données Québec, CC BY 4.0</a:t>
             </a:r>
           </a:p>
         </p:txBody>
@@ -6019,7 +6019,7 @@
                 </a:solidFill>
                 <a:latin typeface="Calibri"/>
               </a:rPr>
-              <a:t>Données Québec, CC BY 4.0</a:t>
+              <a:t>Loi 25 : publique après consentement</a:t>
             </a:r>
           </a:p>
         </p:txBody>
@@ -6642,7 +6642,7 @@
                 </a:solidFill>
                 <a:latin typeface="Calibri"/>
               </a:rPr>
-              <a:t>Phase 2 : l’IA lit la demande libre</a:t>
+              <a:t>IA phase 2 : toutes les langues, toutes les fautes</a:t>
             </a:r>
           </a:p>
         </p:txBody>

--- a/docs/pitch/Maillage.pptx
+++ b/docs/pitch/Maillage.pptx
@@ -7019,7 +7019,7 @@
                 </a:solidFill>
                 <a:latin typeface="Calibri"/>
               </a:rPr>
-              <a:t>Maintenant : démo simulée, fil local</a:t>
+              <a:t>Maintenant : démo simulée, fil en direct en option (Canada)</a:t>
             </a:r>
           </a:p>
         </p:txBody>

--- a/docs/pitch/Maillage.pptx
+++ b/docs/pitch/Maillage.pptx
@@ -583,12 +583,17 @@
           <a:lstStyle/>
           <a:p>
             <a:r>
+              <a:t>Citation réelle, seulement si on en a une : remplacer la quatrième carte par « [CITATION RÉELLE ICI, sinon laisser la carte de repli] » avant l’export PDF de 12 h 30. Jamais de crochets sur une diapo projetée.</a:t>
+            </a:r>
+          </a:p>
+          <a:p>
+            <a:r>
               <a:t>Visuel : trois icônes isolées (café, artiste, organisme) à cinq minutes à pied.</a:t>
             </a:r>
           </a:p>
           <a:p>
             <a:r>
-              <a:t>Ce qu’on a entendu : une seule vraie citation d’un commerçant rencontré vendredi matin, à écrire sur la diapo avant l’export PDF de 12 h 30. Si on n’a rien de vrai, retirer la carte : ne jamais inventer une citation.</a:t>
+              <a:t>Carte « Ce qu’on a entendu » : par défaut la phrase de repli, vraie sans rien ajouter (dite jeudi 15 octobre par l’intervenant qui présentait le quartier); si un commerçant rencontré vendredi matin a donné une vraie citation, elle la remplace, telle quelle, sans nom si la personne ne l’a pas permis. Ne jamais inventer une citation.</a:t>
             </a:r>
           </a:p>
           <a:p>
@@ -668,7 +673,7 @@
           </a:p>
           <a:p>
             <a:r>
-              <a:t>Signal [CIAN] : « Voyons comment ça marche », puis passer à l’app : coller la phrase « On a un espace libre le jeudi soir et on cherche des artistes pour l’animer », 87 % avec Camille Vézina et le Collectif Les Voisins en Scène, dire la réciprocité, puis « Voir ce que Camille reçoit » et « Accepter ». Si l’app plante : Visite guidée (environ 57 s). (1 min 50 s avec la démo)</a:t>
+              <a:t>Signal [CIAN] : « Voyons comment ça marche », puis passer à l’app : coller la phrase « On a un espace libre le jeudi soir et on cherche des artistes pour l’animer », 87 % avec Camille Vézina et le Collectif Les Voisins en Scène, dire la réciprocité, toucher « Comment ce score » et dire la ligne « Réciprocité 58 % », puis « Voir ce que Camille reçoit » et « Accepter ». Si l’app plante : Visite guidée, chapitres 1 à 4 seulement (environ 73 s; la visite complète dure 2 min), puis « Quitter la visite ». (1 min 45 s avec la démo)</a:t>
             </a:r>
           </a:p>
         </p:txBody>
@@ -758,7 +763,7 @@
           </a:p>
           <a:p>
             <a:r>
-              <a:t>Signal [CIAN] : dire « Maillage part des répertoires qui existent déjà : les 386 membres du fichier fourni par la SDC, et 614 organismes reconnus à l’échelle de la ville. Personne ne commence avec une page blanche. » Puis la Loi 25 : « Pour la Loi 25, le consentement décide. Ces répertoires pré-remplissent les fiches; une fiche devient publique seulement si son responsable la réclame, avec un code envoyé à l’adresse que la SDC ou la Ville a déjà, et consent. Sinon, seule la SDC la voit. La démo montre des fiches fictives, marquées pré-rempli. » Nos règles s’appuient aussi sur le Plan d’action Saint-Roch. (38 s)</a:t>
+              <a:t>Signal [CIAN] : dire « Maillage part des répertoires qui existent déjà : les 386 membres du fichier fourni par la SDC, et 614 organismes reconnus à l’échelle de la ville. Personne ne commence avec une page blanche. » Puis la Loi 25 : « Pour la Loi 25, le consentement décide. Ces répertoires pré-remplissent les fiches. Une fiche devient publique seulement après réclamation, avec un code et un consentement; en pilote, une fiche non réclamée n’est visible que par la SDC. Le code part à l’adresse que la SDC ou la Ville a déjà au dossier, jamais à celle qu’on tape. Dans cette démo, les fiches pré-remplies sont fictives et marquées. Les personnes, elles, ne sont jamais pré-remplies. » (Dans la démo, les neuf fiches pré-remplies fictives restent visibles sur la carte, voulu, avec l’étiquette « Pré-rempli · visible ici pour la démo », sans coordonnées : la règle du pilote n’est pas codée; ne pas dire le contraire.) Nos règles s’appuient aussi sur le Plan d’action Saint-Roch. (42 s)</a:t>
             </a:r>
           </a:p>
         </p:txBody>
@@ -928,7 +933,7 @@
           </a:p>
           <a:p>
             <a:r>
-              <a:t>Signal [CIAN] : portée : « Maillage règle un problème précis : trouver le bon partenaire, se mettre d’accord et passer à l’action. On s’arrête là où d’autres outils existent : 311, 911, financement. » Puis le fil : « Le fil est local aujourd’hui; en pilote, une table gratuite derrière le même écran, modérée par la SDC. » Puis coût : « Le pilote coûte un hébergement gratuit et une personne à temps partiel à la SDC. » (55 s)</a:t>
+              <a:t>Signal [CIAN] : portée : « Maillage règle un problème précis : trouver le bon partenaire, se mettre d’accord et passer à l’action. On s’arrête là où d’autres outils existent : 311, 911, financement. » Puis le fil et la modération, une seule fois : « Le fil de la démo est simulé; un vrai fil partagé existe déjà en option, hébergé au Canada. Le tableau de modération pour la SDC est prévu, pas construit. » Puis la demande de pilote : « Ce qu’on demande à la SDC : dix membres volontaires, un trimestre, une personne à temps partiel et un export du fichier des membres. On mesure trois chiffres, et on décide ensemble si on étend. » (45 s)</a:t>
             </a:r>
           </a:p>
           <a:p>
@@ -4085,7 +4090,7 @@
         <p:spPr>
           <a:xfrm>
             <a:off x="640080" y="1737360"/>
-            <a:ext cx="10911535" cy="1463040"/>
+            <a:ext cx="6766560" cy="1463040"/>
           </a:xfrm>
           <a:prstGeom prst="rect">
             <a:avLst/>
@@ -4164,7 +4169,7 @@
         <p:spPr>
           <a:xfrm>
             <a:off x="640080" y="3520440"/>
-            <a:ext cx="10911535" cy="1280160"/>
+            <a:ext cx="6766560" cy="1280160"/>
           </a:xfrm>
           <a:prstGeom prst="rect">
             <a:avLst/>
@@ -4199,7 +4204,7 @@
         <p:spPr>
           <a:xfrm>
             <a:off x="640080" y="5120640"/>
-            <a:ext cx="10911535" cy="457200"/>
+            <a:ext cx="6766560" cy="457200"/>
           </a:xfrm>
           <a:prstGeom prst="rect">
             <a:avLst/>
@@ -4225,6 +4230,30 @@
           </a:p>
         </p:txBody>
       </p:sp>
+      <p:pic>
+        <p:nvPicPr>
+          <p:cNvPr id="7" name="Picture 6" descr="slide-1.png"/>
+          <p:cNvPicPr>
+            <a:picLocks noChangeAspect="1"/>
+          </p:cNvPicPr>
+          <p:nvPr/>
+        </p:nvPicPr>
+        <p:blipFill>
+          <a:blip r:embed="rId2"/>
+          <a:stretch>
+            <a:fillRect/>
+          </a:stretch>
+        </p:blipFill>
+        <p:spPr>
+          <a:xfrm>
+            <a:off x="8446174" y="731520"/>
+            <a:ext cx="2492931" cy="5394960"/>
+          </a:xfrm>
+          <a:prstGeom prst="rect">
+            <a:avLst/>
+          </a:prstGeom>
+        </p:spPr>
+      </p:pic>
     </p:spTree>
   </p:cSld>
   <p:clrMapOvr>
@@ -4896,7 +4925,7 @@
                 </a:solidFill>
                 <a:latin typeface="Calibri"/>
               </a:rPr>
-              <a:t>Ce qu’on a entendu : [À REMPLIR VENDREDI MATIN]</a:t>
+              <a:t>Ce qu’on a entendu hier : les initiatives existent, le réseau manque.</a:t>
             </a:r>
           </a:p>
         </p:txBody>
@@ -5129,7 +5158,7 @@
         <p:spPr>
           <a:xfrm>
             <a:off x="640080" y="1783080"/>
-            <a:ext cx="10911535" cy="1371600"/>
+            <a:ext cx="6309360" cy="1371600"/>
           </a:xfrm>
           <a:prstGeom prst="rect">
             <a:avLst/>
@@ -5144,7 +5173,7 @@
           <a:p>
             <a:pPr algn="l"/>
             <a:r>
-              <a:rPr sz="3400" b="1">
+              <a:rPr sz="3000" b="1">
                 <a:solidFill>
                   <a:srgbClr val="222B27"/>
                 </a:solidFill>
@@ -5155,9 +5184,33 @@
           </a:p>
         </p:txBody>
       </p:sp>
-      <p:sp>
-        <p:nvSpPr>
-          <p:cNvPr id="6" name="TextBox 5"/>
+      <p:pic>
+        <p:nvPicPr>
+          <p:cNvPr id="6" name="Picture 5" descr="slide-3.png"/>
+          <p:cNvPicPr>
+            <a:picLocks noChangeAspect="1"/>
+          </p:cNvPicPr>
+          <p:nvPr/>
+        </p:nvPicPr>
+        <p:blipFill>
+          <a:blip r:embed="rId2"/>
+          <a:stretch>
+            <a:fillRect/>
+          </a:stretch>
+        </p:blipFill>
+        <p:spPr>
+          <a:xfrm>
+            <a:off x="8439403" y="1691640"/>
+            <a:ext cx="2049274" cy="4434840"/>
+          </a:xfrm>
+          <a:prstGeom prst="rect">
+            <a:avLst/>
+          </a:prstGeom>
+        </p:spPr>
+      </p:pic>
+      <p:sp>
+        <p:nvSpPr>
+          <p:cNvPr id="7" name="TextBox 6"/>
           <p:cNvSpPr txBox="1"/>
           <p:nvPr/>
         </p:nvSpPr>
@@ -5185,14 +5238,14 @@
                 </a:solidFill>
                 <a:latin typeface="Calibri"/>
               </a:rPr>
-              <a:t>Équipe 14 · Maillage</a:t>
-            </a:r>
-          </a:p>
-        </p:txBody>
-      </p:sp>
-      <p:sp>
-        <p:nvSpPr>
-          <p:cNvPr id="7" name="TextBox 6"/>
+              <a:t>Équipe 14 · Maillage  ·  Fond de carte : © OpenStreetMap, OpenFreeMap</a:t>
+            </a:r>
+          </a:p>
+        </p:txBody>
+      </p:sp>
+      <p:sp>
+        <p:nvSpPr>
+          <p:cNvPr id="8" name="TextBox 7"/>
           <p:cNvSpPr txBox="1"/>
           <p:nvPr/>
         </p:nvSpPr>
@@ -5383,7 +5436,7 @@
         <p:spPr>
           <a:xfrm>
             <a:off x="640080" y="1783080"/>
-            <a:ext cx="10911535" cy="1371600"/>
+            <a:ext cx="6309360" cy="1371600"/>
           </a:xfrm>
           <a:prstGeom prst="rect">
             <a:avLst/>
@@ -5398,7 +5451,7 @@
           <a:p>
             <a:pPr algn="l"/>
             <a:r>
-              <a:rPr sz="3400" b="1">
+              <a:rPr sz="3000" b="1">
                 <a:solidFill>
                   <a:srgbClr val="222B27"/>
                 </a:solidFill>
@@ -5418,7 +5471,7 @@
         <p:spPr>
           <a:xfrm>
             <a:off x="640080" y="3337560"/>
-            <a:ext cx="1999427" cy="2377440"/>
+            <a:ext cx="6309360" cy="448056"/>
           </a:xfrm>
           <a:prstGeom prst="roundRect">
             <a:avLst/>
@@ -5462,7 +5515,7 @@
         <p:spPr>
           <a:xfrm>
             <a:off x="640080" y="3337560"/>
-            <a:ext cx="1999427" cy="109728"/>
+            <a:ext cx="109728" cy="448056"/>
           </a:xfrm>
           <a:prstGeom prst="rect">
             <a:avLst/>
@@ -5505,8 +5558,8 @@
         </p:nvSpPr>
         <p:spPr>
           <a:xfrm>
-            <a:off x="822960" y="3566160"/>
-            <a:ext cx="1633667" cy="2011680"/>
+            <a:off x="914400" y="3337560"/>
+            <a:ext cx="5943600" cy="448056"/>
           </a:xfrm>
           <a:prstGeom prst="rect">
             <a:avLst/>
@@ -5540,8 +5593,8 @@
         </p:nvSpPr>
         <p:spPr>
           <a:xfrm>
-            <a:off x="2868107" y="3337560"/>
-            <a:ext cx="1999427" cy="2377440"/>
+            <a:off x="640080" y="3895344"/>
+            <a:ext cx="6309360" cy="448056"/>
           </a:xfrm>
           <a:prstGeom prst="roundRect">
             <a:avLst/>
@@ -5584,8 +5637,8 @@
         </p:nvSpPr>
         <p:spPr>
           <a:xfrm>
-            <a:off x="2868107" y="3337560"/>
-            <a:ext cx="1999427" cy="109728"/>
+            <a:off x="640080" y="3895344"/>
+            <a:ext cx="109728" cy="448056"/>
           </a:xfrm>
           <a:prstGeom prst="rect">
             <a:avLst/>
@@ -5628,8 +5681,8 @@
         </p:nvSpPr>
         <p:spPr>
           <a:xfrm>
-            <a:off x="3050987" y="3566160"/>
-            <a:ext cx="1633667" cy="2011680"/>
+            <a:off x="914400" y="3895344"/>
+            <a:ext cx="5943600" cy="448056"/>
           </a:xfrm>
           <a:prstGeom prst="rect">
             <a:avLst/>
@@ -5663,8 +5716,8 @@
         </p:nvSpPr>
         <p:spPr>
           <a:xfrm>
-            <a:off x="5096134" y="3337560"/>
-            <a:ext cx="1999427" cy="2377440"/>
+            <a:off x="640080" y="4453128"/>
+            <a:ext cx="6309360" cy="448056"/>
           </a:xfrm>
           <a:prstGeom prst="roundRect">
             <a:avLst/>
@@ -5707,8 +5760,8 @@
         </p:nvSpPr>
         <p:spPr>
           <a:xfrm>
-            <a:off x="5096134" y="3337560"/>
-            <a:ext cx="1999427" cy="109728"/>
+            <a:off x="640080" y="4453128"/>
+            <a:ext cx="109728" cy="448056"/>
           </a:xfrm>
           <a:prstGeom prst="rect">
             <a:avLst/>
@@ -5751,8 +5804,8 @@
         </p:nvSpPr>
         <p:spPr>
           <a:xfrm>
-            <a:off x="5279014" y="3566160"/>
-            <a:ext cx="1633667" cy="2011680"/>
+            <a:off x="914400" y="4453128"/>
+            <a:ext cx="5943600" cy="448056"/>
           </a:xfrm>
           <a:prstGeom prst="rect">
             <a:avLst/>
@@ -5786,8 +5839,8 @@
         </p:nvSpPr>
         <p:spPr>
           <a:xfrm>
-            <a:off x="7324161" y="3337560"/>
-            <a:ext cx="1999427" cy="2377440"/>
+            <a:off x="640080" y="5010912"/>
+            <a:ext cx="6309360" cy="448056"/>
           </a:xfrm>
           <a:prstGeom prst="roundRect">
             <a:avLst/>
@@ -5830,8 +5883,8 @@
         </p:nvSpPr>
         <p:spPr>
           <a:xfrm>
-            <a:off x="7324161" y="3337560"/>
-            <a:ext cx="1999427" cy="109728"/>
+            <a:off x="640080" y="5010912"/>
+            <a:ext cx="109728" cy="448056"/>
           </a:xfrm>
           <a:prstGeom prst="rect">
             <a:avLst/>
@@ -5874,8 +5927,8 @@
         </p:nvSpPr>
         <p:spPr>
           <a:xfrm>
-            <a:off x="7507041" y="3566160"/>
-            <a:ext cx="1633667" cy="2011680"/>
+            <a:off x="914400" y="5010912"/>
+            <a:ext cx="5943600" cy="448056"/>
           </a:xfrm>
           <a:prstGeom prst="rect">
             <a:avLst/>
@@ -5909,8 +5962,8 @@
         </p:nvSpPr>
         <p:spPr>
           <a:xfrm>
-            <a:off x="9552188" y="3337560"/>
-            <a:ext cx="1999427" cy="2377440"/>
+            <a:off x="640080" y="5568696"/>
+            <a:ext cx="6309360" cy="448056"/>
           </a:xfrm>
           <a:prstGeom prst="roundRect">
             <a:avLst/>
@@ -5953,8 +6006,8 @@
         </p:nvSpPr>
         <p:spPr>
           <a:xfrm>
-            <a:off x="9552188" y="3337560"/>
-            <a:ext cx="1999427" cy="109728"/>
+            <a:off x="640080" y="5568696"/>
+            <a:ext cx="109728" cy="448056"/>
           </a:xfrm>
           <a:prstGeom prst="rect">
             <a:avLst/>
@@ -5997,8 +6050,8 @@
         </p:nvSpPr>
         <p:spPr>
           <a:xfrm>
-            <a:off x="9735068" y="3566160"/>
-            <a:ext cx="1633667" cy="2011680"/>
+            <a:off x="914400" y="5568696"/>
+            <a:ext cx="5943600" cy="448056"/>
           </a:xfrm>
           <a:prstGeom prst="rect">
             <a:avLst/>
@@ -6024,9 +6077,33 @@
           </a:p>
         </p:txBody>
       </p:sp>
-      <p:sp>
-        <p:nvSpPr>
-          <p:cNvPr id="21" name="TextBox 20"/>
+      <p:pic>
+        <p:nvPicPr>
+          <p:cNvPr id="21" name="Picture 20" descr="slide-4.png"/>
+          <p:cNvPicPr>
+            <a:picLocks noChangeAspect="1"/>
+          </p:cNvPicPr>
+          <p:nvPr/>
+        </p:nvPicPr>
+        <p:blipFill>
+          <a:blip r:embed="rId2"/>
+          <a:stretch>
+            <a:fillRect/>
+          </a:stretch>
+        </p:blipFill>
+        <p:spPr>
+          <a:xfrm>
+            <a:off x="8439403" y="1691640"/>
+            <a:ext cx="2049274" cy="4434840"/>
+          </a:xfrm>
+          <a:prstGeom prst="rect">
+            <a:avLst/>
+          </a:prstGeom>
+        </p:spPr>
+      </p:pic>
+      <p:sp>
+        <p:nvSpPr>
+          <p:cNvPr id="22" name="TextBox 21"/>
           <p:cNvSpPr txBox="1"/>
           <p:nvPr/>
         </p:nvSpPr>
@@ -6054,14 +6131,14 @@
                 </a:solidFill>
                 <a:latin typeface="Calibri"/>
               </a:rPr>
-              <a:t>Équipe 14 · Maillage</a:t>
-            </a:r>
-          </a:p>
-        </p:txBody>
-      </p:sp>
-      <p:sp>
-        <p:nvSpPr>
-          <p:cNvPr id="22" name="TextBox 21"/>
+              <a:t>Équipe 14 · Maillage  ·  Fond de carte : © OpenStreetMap, OpenFreeMap</a:t>
+            </a:r>
+          </a:p>
+        </p:txBody>
+      </p:sp>
+      <p:sp>
+        <p:nvSpPr>
+          <p:cNvPr id="23" name="TextBox 22"/>
           <p:cNvSpPr txBox="1"/>
           <p:nvPr/>
         </p:nvSpPr>
@@ -6252,7 +6329,7 @@
         <p:spPr>
           <a:xfrm>
             <a:off x="640080" y="1783080"/>
-            <a:ext cx="10911535" cy="1371600"/>
+            <a:ext cx="6309360" cy="1371600"/>
           </a:xfrm>
           <a:prstGeom prst="rect">
             <a:avLst/>
@@ -6267,7 +6344,7 @@
           <a:p>
             <a:pPr algn="l"/>
             <a:r>
-              <a:rPr sz="3400" b="1">
+              <a:rPr sz="3000" b="1">
                 <a:solidFill>
                   <a:srgbClr val="222B27"/>
                 </a:solidFill>
@@ -6287,7 +6364,7 @@
         <p:spPr>
           <a:xfrm>
             <a:off x="640080" y="3337560"/>
-            <a:ext cx="3484778" cy="2377440"/>
+            <a:ext cx="6309360" cy="819912"/>
           </a:xfrm>
           <a:prstGeom prst="roundRect">
             <a:avLst/>
@@ -6331,7 +6408,7 @@
         <p:spPr>
           <a:xfrm>
             <a:off x="640080" y="3337560"/>
-            <a:ext cx="3484778" cy="109728"/>
+            <a:ext cx="109728" cy="819912"/>
           </a:xfrm>
           <a:prstGeom prst="rect">
             <a:avLst/>
@@ -6374,8 +6451,8 @@
         </p:nvSpPr>
         <p:spPr>
           <a:xfrm>
-            <a:off x="822960" y="3566160"/>
-            <a:ext cx="3119018" cy="2011680"/>
+            <a:off x="914400" y="3337560"/>
+            <a:ext cx="5943600" cy="819912"/>
           </a:xfrm>
           <a:prstGeom prst="rect">
             <a:avLst/>
@@ -6390,7 +6467,7 @@
           <a:p>
             <a:pPr algn="l"/>
             <a:r>
-              <a:rPr sz="2400" b="0">
+              <a:rPr sz="2000" b="0">
                 <a:solidFill>
                   <a:srgbClr val="222B27"/>
                 </a:solidFill>
@@ -6409,8 +6486,8 @@
         </p:nvSpPr>
         <p:spPr>
           <a:xfrm>
-            <a:off x="4353458" y="3337560"/>
-            <a:ext cx="3484778" cy="2377440"/>
+            <a:off x="640080" y="4267200"/>
+            <a:ext cx="6309360" cy="819912"/>
           </a:xfrm>
           <a:prstGeom prst="roundRect">
             <a:avLst/>
@@ -6453,8 +6530,8 @@
         </p:nvSpPr>
         <p:spPr>
           <a:xfrm>
-            <a:off x="4353458" y="3337560"/>
-            <a:ext cx="3484778" cy="109728"/>
+            <a:off x="640080" y="4267200"/>
+            <a:ext cx="109728" cy="819912"/>
           </a:xfrm>
           <a:prstGeom prst="rect">
             <a:avLst/>
@@ -6497,8 +6574,8 @@
         </p:nvSpPr>
         <p:spPr>
           <a:xfrm>
-            <a:off x="4536338" y="3566160"/>
-            <a:ext cx="3119018" cy="2011680"/>
+            <a:off x="914400" y="4267200"/>
+            <a:ext cx="5943600" cy="819912"/>
           </a:xfrm>
           <a:prstGeom prst="rect">
             <a:avLst/>
@@ -6513,7 +6590,7 @@
           <a:p>
             <a:pPr algn="l"/>
             <a:r>
-              <a:rPr sz="2400" b="0">
+              <a:rPr sz="2000" b="0">
                 <a:solidFill>
                   <a:srgbClr val="222B27"/>
                 </a:solidFill>
@@ -6532,8 +6609,8 @@
         </p:nvSpPr>
         <p:spPr>
           <a:xfrm>
-            <a:off x="8066836" y="3337560"/>
-            <a:ext cx="3484778" cy="2377440"/>
+            <a:off x="640080" y="5196840"/>
+            <a:ext cx="6309360" cy="819912"/>
           </a:xfrm>
           <a:prstGeom prst="roundRect">
             <a:avLst/>
@@ -6576,8 +6653,8 @@
         </p:nvSpPr>
         <p:spPr>
           <a:xfrm>
-            <a:off x="8066836" y="3337560"/>
-            <a:ext cx="3484778" cy="109728"/>
+            <a:off x="640080" y="5196840"/>
+            <a:ext cx="109728" cy="819912"/>
           </a:xfrm>
           <a:prstGeom prst="rect">
             <a:avLst/>
@@ -6620,8 +6697,8 @@
         </p:nvSpPr>
         <p:spPr>
           <a:xfrm>
-            <a:off x="8249716" y="3566160"/>
-            <a:ext cx="3119018" cy="2011680"/>
+            <a:off x="914400" y="5196840"/>
+            <a:ext cx="5943600" cy="819912"/>
           </a:xfrm>
           <a:prstGeom prst="rect">
             <a:avLst/>
@@ -6636,7 +6713,7 @@
           <a:p>
             <a:pPr algn="l"/>
             <a:r>
-              <a:rPr sz="2400" b="0">
+              <a:rPr sz="2000" b="0">
                 <a:solidFill>
                   <a:srgbClr val="222B27"/>
                 </a:solidFill>
@@ -6647,9 +6724,33 @@
           </a:p>
         </p:txBody>
       </p:sp>
-      <p:sp>
-        <p:nvSpPr>
-          <p:cNvPr id="15" name="TextBox 14"/>
+      <p:pic>
+        <p:nvPicPr>
+          <p:cNvPr id="15" name="Picture 14" descr="slide-5.png"/>
+          <p:cNvPicPr>
+            <a:picLocks noChangeAspect="1"/>
+          </p:cNvPicPr>
+          <p:nvPr/>
+        </p:nvPicPr>
+        <p:blipFill>
+          <a:blip r:embed="rId2"/>
+          <a:stretch>
+            <a:fillRect/>
+          </a:stretch>
+        </p:blipFill>
+        <p:spPr>
+          <a:xfrm>
+            <a:off x="8439403" y="1691640"/>
+            <a:ext cx="2049274" cy="4434840"/>
+          </a:xfrm>
+          <a:prstGeom prst="rect">
+            <a:avLst/>
+          </a:prstGeom>
+        </p:spPr>
+      </p:pic>
+      <p:sp>
+        <p:nvSpPr>
+          <p:cNvPr id="16" name="TextBox 15"/>
           <p:cNvSpPr txBox="1"/>
           <p:nvPr/>
         </p:nvSpPr>
@@ -6677,14 +6778,14 @@
                 </a:solidFill>
                 <a:latin typeface="Calibri"/>
               </a:rPr>
-              <a:t>Équipe 14 · Maillage</a:t>
-            </a:r>
-          </a:p>
-        </p:txBody>
-      </p:sp>
-      <p:sp>
-        <p:nvSpPr>
-          <p:cNvPr id="16" name="TextBox 15"/>
+              <a:t>Équipe 14 · Maillage  ·  Fond de carte : © OpenStreetMap, OpenFreeMap</a:t>
+            </a:r>
+          </a:p>
+        </p:txBody>
+      </p:sp>
+      <p:sp>
+        <p:nvSpPr>
+          <p:cNvPr id="17" name="TextBox 16"/>
           <p:cNvSpPr txBox="1"/>
           <p:nvPr/>
         </p:nvSpPr>
@@ -6875,7 +6976,7 @@
         <p:spPr>
           <a:xfrm>
             <a:off x="640080" y="1783080"/>
-            <a:ext cx="10911535" cy="1371600"/>
+            <a:ext cx="6309360" cy="1371600"/>
           </a:xfrm>
           <a:prstGeom prst="rect">
             <a:avLst/>
@@ -6890,7 +6991,7 @@
           <a:p>
             <a:pPr algn="l"/>
             <a:r>
-              <a:rPr sz="3400" b="1">
+              <a:rPr sz="3000" b="1">
                 <a:solidFill>
                   <a:srgbClr val="222B27"/>
                 </a:solidFill>
@@ -6910,7 +7011,7 @@
         <p:spPr>
           <a:xfrm>
             <a:off x="640080" y="3337560"/>
-            <a:ext cx="3484778" cy="2377440"/>
+            <a:ext cx="6309360" cy="448056"/>
           </a:xfrm>
           <a:prstGeom prst="roundRect">
             <a:avLst/>
@@ -6954,7 +7055,7 @@
         <p:spPr>
           <a:xfrm>
             <a:off x="640080" y="3337560"/>
-            <a:ext cx="3484778" cy="109728"/>
+            <a:ext cx="109728" cy="448056"/>
           </a:xfrm>
           <a:prstGeom prst="rect">
             <a:avLst/>
@@ -6997,8 +7098,8 @@
         </p:nvSpPr>
         <p:spPr>
           <a:xfrm>
-            <a:off x="822960" y="3566160"/>
-            <a:ext cx="3119018" cy="2011680"/>
+            <a:off x="914400" y="3337560"/>
+            <a:ext cx="5943600" cy="448056"/>
           </a:xfrm>
           <a:prstGeom prst="rect">
             <a:avLst/>
@@ -7013,7 +7114,7 @@
           <a:p>
             <a:pPr algn="l"/>
             <a:r>
-              <a:rPr sz="2400" b="0">
+              <a:rPr sz="2000" b="0">
                 <a:solidFill>
                   <a:srgbClr val="222B27"/>
                 </a:solidFill>
@@ -7032,8 +7133,8 @@
         </p:nvSpPr>
         <p:spPr>
           <a:xfrm>
-            <a:off x="4353458" y="3337560"/>
-            <a:ext cx="3484778" cy="2377440"/>
+            <a:off x="640080" y="3895344"/>
+            <a:ext cx="6309360" cy="448056"/>
           </a:xfrm>
           <a:prstGeom prst="roundRect">
             <a:avLst/>
@@ -7076,8 +7177,8 @@
         </p:nvSpPr>
         <p:spPr>
           <a:xfrm>
-            <a:off x="4353458" y="3337560"/>
-            <a:ext cx="3484778" cy="109728"/>
+            <a:off x="640080" y="3895344"/>
+            <a:ext cx="109728" cy="448056"/>
           </a:xfrm>
           <a:prstGeom prst="rect">
             <a:avLst/>
@@ -7120,8 +7221,8 @@
         </p:nvSpPr>
         <p:spPr>
           <a:xfrm>
-            <a:off x="4536338" y="3566160"/>
-            <a:ext cx="3119018" cy="2011680"/>
+            <a:off x="914400" y="3895344"/>
+            <a:ext cx="5943600" cy="448056"/>
           </a:xfrm>
           <a:prstGeom prst="rect">
             <a:avLst/>
@@ -7136,7 +7237,7 @@
           <a:p>
             <a:pPr algn="l"/>
             <a:r>
-              <a:rPr sz="2400" b="0">
+              <a:rPr sz="2000" b="0">
                 <a:solidFill>
                   <a:srgbClr val="222B27"/>
                 </a:solidFill>
@@ -7155,8 +7256,8 @@
         </p:nvSpPr>
         <p:spPr>
           <a:xfrm>
-            <a:off x="8066836" y="3337560"/>
-            <a:ext cx="3484778" cy="2377440"/>
+            <a:off x="640080" y="4453128"/>
+            <a:ext cx="6309360" cy="448056"/>
           </a:xfrm>
           <a:prstGeom prst="roundRect">
             <a:avLst/>
@@ -7199,8 +7300,8 @@
         </p:nvSpPr>
         <p:spPr>
           <a:xfrm>
-            <a:off x="8066836" y="3337560"/>
-            <a:ext cx="3484778" cy="109728"/>
+            <a:off x="640080" y="4453128"/>
+            <a:ext cx="109728" cy="448056"/>
           </a:xfrm>
           <a:prstGeom prst="rect">
             <a:avLst/>
@@ -7243,8 +7344,8 @@
         </p:nvSpPr>
         <p:spPr>
           <a:xfrm>
-            <a:off x="8249716" y="3566160"/>
-            <a:ext cx="3119018" cy="2011680"/>
+            <a:off x="914400" y="4453128"/>
+            <a:ext cx="5943600" cy="448056"/>
           </a:xfrm>
           <a:prstGeom prst="rect">
             <a:avLst/>
@@ -7259,7 +7360,7 @@
           <a:p>
             <a:pPr algn="l"/>
             <a:r>
-              <a:rPr sz="2400" b="0">
+              <a:rPr sz="2000" b="0">
                 <a:solidFill>
                   <a:srgbClr val="222B27"/>
                 </a:solidFill>
@@ -7272,7 +7373,277 @@
       </p:sp>
       <p:sp>
         <p:nvSpPr>
-          <p:cNvPr id="15" name="TextBox 14"/>
+          <p:cNvPr id="15" name="Rounded Rectangle 14"/>
+          <p:cNvSpPr/>
+          <p:nvPr/>
+        </p:nvSpPr>
+        <p:spPr>
+          <a:xfrm>
+            <a:off x="640080" y="5010912"/>
+            <a:ext cx="6309360" cy="448056"/>
+          </a:xfrm>
+          <a:prstGeom prst="roundRect">
+            <a:avLst/>
+          </a:prstGeom>
+          <a:solidFill>
+            <a:srgbClr val="FFFFFF"/>
+          </a:solidFill>
+          <a:ln>
+            <a:noFill/>
+          </a:ln>
+          <a:effectLst/>
+        </p:spPr>
+        <p:style>
+          <a:lnRef idx="1">
+            <a:schemeClr val="accent1"/>
+          </a:lnRef>
+          <a:fillRef idx="3">
+            <a:schemeClr val="accent1"/>
+          </a:fillRef>
+          <a:effectRef idx="2">
+            <a:schemeClr val="accent1"/>
+          </a:effectRef>
+          <a:fontRef idx="minor">
+            <a:schemeClr val="lt1"/>
+          </a:fontRef>
+        </p:style>
+        <p:txBody>
+          <a:bodyPr rtlCol="0" anchor="ctr"/>
+          <a:lstStyle/>
+          <a:p>
+            <a:pPr algn="ctr"/>
+          </a:p>
+        </p:txBody>
+      </p:sp>
+      <p:sp>
+        <p:nvSpPr>
+          <p:cNvPr id="16" name="Rectangle 15"/>
+          <p:cNvSpPr/>
+          <p:nvPr/>
+        </p:nvSpPr>
+        <p:spPr>
+          <a:xfrm>
+            <a:off x="640080" y="5010912"/>
+            <a:ext cx="109728" cy="448056"/>
+          </a:xfrm>
+          <a:prstGeom prst="rect">
+            <a:avLst/>
+          </a:prstGeom>
+          <a:solidFill>
+            <a:srgbClr val="E8833A"/>
+          </a:solidFill>
+          <a:ln>
+            <a:noFill/>
+          </a:ln>
+          <a:effectLst/>
+        </p:spPr>
+        <p:style>
+          <a:lnRef idx="1">
+            <a:schemeClr val="accent1"/>
+          </a:lnRef>
+          <a:fillRef idx="3">
+            <a:schemeClr val="accent1"/>
+          </a:fillRef>
+          <a:effectRef idx="2">
+            <a:schemeClr val="accent1"/>
+          </a:effectRef>
+          <a:fontRef idx="minor">
+            <a:schemeClr val="lt1"/>
+          </a:fontRef>
+        </p:style>
+        <p:txBody>
+          <a:bodyPr rtlCol="0" anchor="ctr"/>
+          <a:lstStyle/>
+          <a:p>
+            <a:pPr algn="ctr"/>
+          </a:p>
+        </p:txBody>
+      </p:sp>
+      <p:sp>
+        <p:nvSpPr>
+          <p:cNvPr id="17" name="TextBox 16"/>
+          <p:cNvSpPr txBox="1"/>
+          <p:nvPr/>
+        </p:nvSpPr>
+        <p:spPr>
+          <a:xfrm>
+            <a:off x="914400" y="5010912"/>
+            <a:ext cx="5943600" cy="448056"/>
+          </a:xfrm>
+          <a:prstGeom prst="rect">
+            <a:avLst/>
+          </a:prstGeom>
+          <a:noFill/>
+        </p:spPr>
+        <p:txBody>
+          <a:bodyPr wrap="square" anchor="ctr">
+            <a:spAutoFit/>
+          </a:bodyPr>
+          <a:lstStyle/>
+          <a:p>
+            <a:pPr algn="l"/>
+            <a:r>
+              <a:rPr sz="2000" b="0">
+                <a:solidFill>
+                  <a:srgbClr val="222B27"/>
+                </a:solidFill>
+                <a:latin typeface="Calibri"/>
+              </a:rPr>
+              <a:t>Ce qu’on demande à la SDC : dix membres volontaires, un trimestre, une personne à temps partiel</a:t>
+            </a:r>
+          </a:p>
+        </p:txBody>
+      </p:sp>
+      <p:sp>
+        <p:nvSpPr>
+          <p:cNvPr id="18" name="Rounded Rectangle 17"/>
+          <p:cNvSpPr/>
+          <p:nvPr/>
+        </p:nvSpPr>
+        <p:spPr>
+          <a:xfrm>
+            <a:off x="640080" y="5568696"/>
+            <a:ext cx="6309360" cy="448056"/>
+          </a:xfrm>
+          <a:prstGeom prst="roundRect">
+            <a:avLst/>
+          </a:prstGeom>
+          <a:solidFill>
+            <a:srgbClr val="FFFFFF"/>
+          </a:solidFill>
+          <a:ln>
+            <a:noFill/>
+          </a:ln>
+          <a:effectLst/>
+        </p:spPr>
+        <p:style>
+          <a:lnRef idx="1">
+            <a:schemeClr val="accent1"/>
+          </a:lnRef>
+          <a:fillRef idx="3">
+            <a:schemeClr val="accent1"/>
+          </a:fillRef>
+          <a:effectRef idx="2">
+            <a:schemeClr val="accent1"/>
+          </a:effectRef>
+          <a:fontRef idx="minor">
+            <a:schemeClr val="lt1"/>
+          </a:fontRef>
+        </p:style>
+        <p:txBody>
+          <a:bodyPr rtlCol="0" anchor="ctr"/>
+          <a:lstStyle/>
+          <a:p>
+            <a:pPr algn="ctr"/>
+          </a:p>
+        </p:txBody>
+      </p:sp>
+      <p:sp>
+        <p:nvSpPr>
+          <p:cNvPr id="19" name="Rectangle 18"/>
+          <p:cNvSpPr/>
+          <p:nvPr/>
+        </p:nvSpPr>
+        <p:spPr>
+          <a:xfrm>
+            <a:off x="640080" y="5568696"/>
+            <a:ext cx="109728" cy="448056"/>
+          </a:xfrm>
+          <a:prstGeom prst="rect">
+            <a:avLst/>
+          </a:prstGeom>
+          <a:solidFill>
+            <a:srgbClr val="E8833A"/>
+          </a:solidFill>
+          <a:ln>
+            <a:noFill/>
+          </a:ln>
+          <a:effectLst/>
+        </p:spPr>
+        <p:style>
+          <a:lnRef idx="1">
+            <a:schemeClr val="accent1"/>
+          </a:lnRef>
+          <a:fillRef idx="3">
+            <a:schemeClr val="accent1"/>
+          </a:fillRef>
+          <a:effectRef idx="2">
+            <a:schemeClr val="accent1"/>
+          </a:effectRef>
+          <a:fontRef idx="minor">
+            <a:schemeClr val="lt1"/>
+          </a:fontRef>
+        </p:style>
+        <p:txBody>
+          <a:bodyPr rtlCol="0" anchor="ctr"/>
+          <a:lstStyle/>
+          <a:p>
+            <a:pPr algn="ctr"/>
+          </a:p>
+        </p:txBody>
+      </p:sp>
+      <p:sp>
+        <p:nvSpPr>
+          <p:cNvPr id="20" name="TextBox 19"/>
+          <p:cNvSpPr txBox="1"/>
+          <p:nvPr/>
+        </p:nvSpPr>
+        <p:spPr>
+          <a:xfrm>
+            <a:off x="914400" y="5568696"/>
+            <a:ext cx="5943600" cy="448056"/>
+          </a:xfrm>
+          <a:prstGeom prst="rect">
+            <a:avLst/>
+          </a:prstGeom>
+          <a:noFill/>
+        </p:spPr>
+        <p:txBody>
+          <a:bodyPr wrap="square" anchor="ctr">
+            <a:spAutoFit/>
+          </a:bodyPr>
+          <a:lstStyle/>
+          <a:p>
+            <a:pPr algn="l"/>
+            <a:r>
+              <a:rPr sz="2000" b="0">
+                <a:solidFill>
+                  <a:srgbClr val="222B27"/>
+                </a:solidFill>
+                <a:latin typeface="Calibri"/>
+              </a:rPr>
+              <a:t>trois mesures</a:t>
+            </a:r>
+          </a:p>
+        </p:txBody>
+      </p:sp>
+      <p:pic>
+        <p:nvPicPr>
+          <p:cNvPr id="21" name="Picture 20" descr="slide-6.png"/>
+          <p:cNvPicPr>
+            <a:picLocks noChangeAspect="1"/>
+          </p:cNvPicPr>
+          <p:nvPr/>
+        </p:nvPicPr>
+        <p:blipFill>
+          <a:blip r:embed="rId2"/>
+          <a:stretch>
+            <a:fillRect/>
+          </a:stretch>
+        </p:blipFill>
+        <p:spPr>
+          <a:xfrm>
+            <a:off x="8439403" y="1691640"/>
+            <a:ext cx="2049274" cy="4434840"/>
+          </a:xfrm>
+          <a:prstGeom prst="rect">
+            <a:avLst/>
+          </a:prstGeom>
+        </p:spPr>
+      </p:pic>
+      <p:sp>
+        <p:nvSpPr>
+          <p:cNvPr id="22" name="TextBox 21"/>
           <p:cNvSpPr txBox="1"/>
           <p:nvPr/>
         </p:nvSpPr>
@@ -7300,14 +7671,14 @@
                 </a:solidFill>
                 <a:latin typeface="Calibri"/>
               </a:rPr>
-              <a:t>Équipe 14 · Maillage</a:t>
-            </a:r>
-          </a:p>
-        </p:txBody>
-      </p:sp>
-      <p:sp>
-        <p:nvSpPr>
-          <p:cNvPr id="16" name="TextBox 15"/>
+              <a:t>Équipe 14 · Maillage  ·  Fond de carte : © OpenStreetMap, OpenFreeMap</a:t>
+            </a:r>
+          </a:p>
+        </p:txBody>
+      </p:sp>
+      <p:sp>
+        <p:nvSpPr>
+          <p:cNvPr id="23" name="TextBox 22"/>
           <p:cNvSpPr txBox="1"/>
           <p:nvPr/>
         </p:nvSpPr>
@@ -7498,7 +7869,7 @@
         <p:spPr>
           <a:xfrm>
             <a:off x="640080" y="1783080"/>
-            <a:ext cx="10911535" cy="1371600"/>
+            <a:ext cx="6309360" cy="1371600"/>
           </a:xfrm>
           <a:prstGeom prst="rect">
             <a:avLst/>
@@ -7513,7 +7884,7 @@
           <a:p>
             <a:pPr algn="l"/>
             <a:r>
-              <a:rPr sz="3400" b="1">
+              <a:rPr sz="3000" b="1">
                 <a:solidFill>
                   <a:srgbClr val="222B27"/>
                 </a:solidFill>
@@ -7526,14 +7897,102 @@
       </p:sp>
       <p:sp>
         <p:nvSpPr>
-          <p:cNvPr id="6" name="TextBox 5"/>
+          <p:cNvPr id="6" name="Rounded Rectangle 5"/>
+          <p:cNvSpPr/>
+          <p:nvPr/>
+        </p:nvSpPr>
+        <p:spPr>
+          <a:xfrm>
+            <a:off x="640080" y="3337560"/>
+            <a:ext cx="6309360" cy="819912"/>
+          </a:xfrm>
+          <a:prstGeom prst="roundRect">
+            <a:avLst/>
+          </a:prstGeom>
+          <a:solidFill>
+            <a:srgbClr val="FFFFFF"/>
+          </a:solidFill>
+          <a:ln>
+            <a:noFill/>
+          </a:ln>
+          <a:effectLst/>
+        </p:spPr>
+        <p:style>
+          <a:lnRef idx="1">
+            <a:schemeClr val="accent1"/>
+          </a:lnRef>
+          <a:fillRef idx="3">
+            <a:schemeClr val="accent1"/>
+          </a:fillRef>
+          <a:effectRef idx="2">
+            <a:schemeClr val="accent1"/>
+          </a:effectRef>
+          <a:fontRef idx="minor">
+            <a:schemeClr val="lt1"/>
+          </a:fontRef>
+        </p:style>
+        <p:txBody>
+          <a:bodyPr rtlCol="0" anchor="ctr"/>
+          <a:lstStyle/>
+          <a:p>
+            <a:pPr algn="ctr"/>
+          </a:p>
+        </p:txBody>
+      </p:sp>
+      <p:sp>
+        <p:nvSpPr>
+          <p:cNvPr id="7" name="Rectangle 6"/>
+          <p:cNvSpPr/>
+          <p:nvPr/>
+        </p:nvSpPr>
+        <p:spPr>
+          <a:xfrm>
+            <a:off x="640080" y="3337560"/>
+            <a:ext cx="109728" cy="819912"/>
+          </a:xfrm>
+          <a:prstGeom prst="rect">
+            <a:avLst/>
+          </a:prstGeom>
+          <a:solidFill>
+            <a:srgbClr val="E8833A"/>
+          </a:solidFill>
+          <a:ln>
+            <a:noFill/>
+          </a:ln>
+          <a:effectLst/>
+        </p:spPr>
+        <p:style>
+          <a:lnRef idx="1">
+            <a:schemeClr val="accent1"/>
+          </a:lnRef>
+          <a:fillRef idx="3">
+            <a:schemeClr val="accent1"/>
+          </a:fillRef>
+          <a:effectRef idx="2">
+            <a:schemeClr val="accent1"/>
+          </a:effectRef>
+          <a:fontRef idx="minor">
+            <a:schemeClr val="lt1"/>
+          </a:fontRef>
+        </p:style>
+        <p:txBody>
+          <a:bodyPr rtlCol="0" anchor="ctr"/>
+          <a:lstStyle/>
+          <a:p>
+            <a:pPr algn="ctr"/>
+          </a:p>
+        </p:txBody>
+      </p:sp>
+      <p:sp>
+        <p:nvSpPr>
+          <p:cNvPr id="8" name="TextBox 7"/>
           <p:cNvSpPr txBox="1"/>
           <p:nvPr/>
         </p:nvSpPr>
         <p:spPr>
           <a:xfrm>
-            <a:off x="640080" y="3337560"/>
-            <a:ext cx="10911535" cy="1371600"/>
+            <a:off x="914400" y="3337560"/>
+            <a:ext cx="5943600" cy="819912"/>
           </a:xfrm>
           <a:prstGeom prst="rect">
             <a:avLst/>
@@ -7541,16 +8000,16 @@
           <a:noFill/>
         </p:spPr>
         <p:txBody>
-          <a:bodyPr wrap="square" anchor="t">
+          <a:bodyPr wrap="square" anchor="ctr">
             <a:spAutoFit/>
           </a:bodyPr>
           <a:lstStyle/>
           <a:p>
             <a:pPr algn="l"/>
             <a:r>
-              <a:rPr sz="2400" b="0">
+              <a:rPr sz="2000" b="0">
                 <a:solidFill>
-                  <a:srgbClr val="1F5F4A"/>
+                  <a:srgbClr val="222B27"/>
                 </a:solidFill>
                 <a:latin typeface="Calibri"/>
               </a:rPr>
@@ -7561,7 +8020,277 @@
       </p:sp>
       <p:sp>
         <p:nvSpPr>
-          <p:cNvPr id="7" name="TextBox 6"/>
+          <p:cNvPr id="9" name="Rounded Rectangle 8"/>
+          <p:cNvSpPr/>
+          <p:nvPr/>
+        </p:nvSpPr>
+        <p:spPr>
+          <a:xfrm>
+            <a:off x="640080" y="4267200"/>
+            <a:ext cx="6309360" cy="819912"/>
+          </a:xfrm>
+          <a:prstGeom prst="roundRect">
+            <a:avLst/>
+          </a:prstGeom>
+          <a:solidFill>
+            <a:srgbClr val="FFFFFF"/>
+          </a:solidFill>
+          <a:ln>
+            <a:noFill/>
+          </a:ln>
+          <a:effectLst/>
+        </p:spPr>
+        <p:style>
+          <a:lnRef idx="1">
+            <a:schemeClr val="accent1"/>
+          </a:lnRef>
+          <a:fillRef idx="3">
+            <a:schemeClr val="accent1"/>
+          </a:fillRef>
+          <a:effectRef idx="2">
+            <a:schemeClr val="accent1"/>
+          </a:effectRef>
+          <a:fontRef idx="minor">
+            <a:schemeClr val="lt1"/>
+          </a:fontRef>
+        </p:style>
+        <p:txBody>
+          <a:bodyPr rtlCol="0" anchor="ctr"/>
+          <a:lstStyle/>
+          <a:p>
+            <a:pPr algn="ctr"/>
+          </a:p>
+        </p:txBody>
+      </p:sp>
+      <p:sp>
+        <p:nvSpPr>
+          <p:cNvPr id="10" name="Rectangle 9"/>
+          <p:cNvSpPr/>
+          <p:nvPr/>
+        </p:nvSpPr>
+        <p:spPr>
+          <a:xfrm>
+            <a:off x="640080" y="4267200"/>
+            <a:ext cx="109728" cy="819912"/>
+          </a:xfrm>
+          <a:prstGeom prst="rect">
+            <a:avLst/>
+          </a:prstGeom>
+          <a:solidFill>
+            <a:srgbClr val="E8833A"/>
+          </a:solidFill>
+          <a:ln>
+            <a:noFill/>
+          </a:ln>
+          <a:effectLst/>
+        </p:spPr>
+        <p:style>
+          <a:lnRef idx="1">
+            <a:schemeClr val="accent1"/>
+          </a:lnRef>
+          <a:fillRef idx="3">
+            <a:schemeClr val="accent1"/>
+          </a:fillRef>
+          <a:effectRef idx="2">
+            <a:schemeClr val="accent1"/>
+          </a:effectRef>
+          <a:fontRef idx="minor">
+            <a:schemeClr val="lt1"/>
+          </a:fontRef>
+        </p:style>
+        <p:txBody>
+          <a:bodyPr rtlCol="0" anchor="ctr"/>
+          <a:lstStyle/>
+          <a:p>
+            <a:pPr algn="ctr"/>
+          </a:p>
+        </p:txBody>
+      </p:sp>
+      <p:sp>
+        <p:nvSpPr>
+          <p:cNvPr id="11" name="TextBox 10"/>
+          <p:cNvSpPr txBox="1"/>
+          <p:nvPr/>
+        </p:nvSpPr>
+        <p:spPr>
+          <a:xfrm>
+            <a:off x="914400" y="4267200"/>
+            <a:ext cx="5943600" cy="819912"/>
+          </a:xfrm>
+          <a:prstGeom prst="rect">
+            <a:avLst/>
+          </a:prstGeom>
+          <a:noFill/>
+        </p:spPr>
+        <p:txBody>
+          <a:bodyPr wrap="square" anchor="ctr">
+            <a:spAutoFit/>
+          </a:bodyPr>
+          <a:lstStyle/>
+          <a:p>
+            <a:pPr algn="l"/>
+            <a:r>
+              <a:rPr sz="2000" b="0">
+                <a:solidFill>
+                  <a:srgbClr val="222B27"/>
+                </a:solidFill>
+                <a:latin typeface="Calibri"/>
+              </a:rPr>
+              <a:t>Outils d’IA : Claude Code et Claude</a:t>
+            </a:r>
+          </a:p>
+        </p:txBody>
+      </p:sp>
+      <p:sp>
+        <p:nvSpPr>
+          <p:cNvPr id="12" name="Rounded Rectangle 11"/>
+          <p:cNvSpPr/>
+          <p:nvPr/>
+        </p:nvSpPr>
+        <p:spPr>
+          <a:xfrm>
+            <a:off x="640080" y="5196840"/>
+            <a:ext cx="6309360" cy="819912"/>
+          </a:xfrm>
+          <a:prstGeom prst="roundRect">
+            <a:avLst/>
+          </a:prstGeom>
+          <a:solidFill>
+            <a:srgbClr val="FFFFFF"/>
+          </a:solidFill>
+          <a:ln>
+            <a:noFill/>
+          </a:ln>
+          <a:effectLst/>
+        </p:spPr>
+        <p:style>
+          <a:lnRef idx="1">
+            <a:schemeClr val="accent1"/>
+          </a:lnRef>
+          <a:fillRef idx="3">
+            <a:schemeClr val="accent1"/>
+          </a:fillRef>
+          <a:effectRef idx="2">
+            <a:schemeClr val="accent1"/>
+          </a:effectRef>
+          <a:fontRef idx="minor">
+            <a:schemeClr val="lt1"/>
+          </a:fontRef>
+        </p:style>
+        <p:txBody>
+          <a:bodyPr rtlCol="0" anchor="ctr"/>
+          <a:lstStyle/>
+          <a:p>
+            <a:pPr algn="ctr"/>
+          </a:p>
+        </p:txBody>
+      </p:sp>
+      <p:sp>
+        <p:nvSpPr>
+          <p:cNvPr id="13" name="Rectangle 12"/>
+          <p:cNvSpPr/>
+          <p:nvPr/>
+        </p:nvSpPr>
+        <p:spPr>
+          <a:xfrm>
+            <a:off x="640080" y="5196840"/>
+            <a:ext cx="109728" cy="819912"/>
+          </a:xfrm>
+          <a:prstGeom prst="rect">
+            <a:avLst/>
+          </a:prstGeom>
+          <a:solidFill>
+            <a:srgbClr val="E8833A"/>
+          </a:solidFill>
+          <a:ln>
+            <a:noFill/>
+          </a:ln>
+          <a:effectLst/>
+        </p:spPr>
+        <p:style>
+          <a:lnRef idx="1">
+            <a:schemeClr val="accent1"/>
+          </a:lnRef>
+          <a:fillRef idx="3">
+            <a:schemeClr val="accent1"/>
+          </a:fillRef>
+          <a:effectRef idx="2">
+            <a:schemeClr val="accent1"/>
+          </a:effectRef>
+          <a:fontRef idx="minor">
+            <a:schemeClr val="lt1"/>
+          </a:fontRef>
+        </p:style>
+        <p:txBody>
+          <a:bodyPr rtlCol="0" anchor="ctr"/>
+          <a:lstStyle/>
+          <a:p>
+            <a:pPr algn="ctr"/>
+          </a:p>
+        </p:txBody>
+      </p:sp>
+      <p:sp>
+        <p:nvSpPr>
+          <p:cNvPr id="14" name="TextBox 13"/>
+          <p:cNvSpPr txBox="1"/>
+          <p:nvPr/>
+        </p:nvSpPr>
+        <p:spPr>
+          <a:xfrm>
+            <a:off x="914400" y="5196840"/>
+            <a:ext cx="5943600" cy="819912"/>
+          </a:xfrm>
+          <a:prstGeom prst="rect">
+            <a:avLst/>
+          </a:prstGeom>
+          <a:noFill/>
+        </p:spPr>
+        <p:txBody>
+          <a:bodyPr wrap="square" anchor="ctr">
+            <a:spAutoFit/>
+          </a:bodyPr>
+          <a:lstStyle/>
+          <a:p>
+            <a:pPr algn="l"/>
+            <a:r>
+              <a:rPr sz="2000" b="0">
+                <a:solidFill>
+                  <a:srgbClr val="222B27"/>
+                </a:solidFill>
+                <a:latin typeface="Calibri"/>
+              </a:rPr>
+              <a:t>fait par l’équipe : cadrage, données, conception, tests, présentation</a:t>
+            </a:r>
+          </a:p>
+        </p:txBody>
+      </p:sp>
+      <p:pic>
+        <p:nvPicPr>
+          <p:cNvPr id="15" name="Picture 14" descr="slide-7.png"/>
+          <p:cNvPicPr>
+            <a:picLocks noChangeAspect="1"/>
+          </p:cNvPicPr>
+          <p:nvPr/>
+        </p:nvPicPr>
+        <p:blipFill>
+          <a:blip r:embed="rId2"/>
+          <a:stretch>
+            <a:fillRect/>
+          </a:stretch>
+        </p:blipFill>
+        <p:spPr>
+          <a:xfrm>
+            <a:off x="7315200" y="1760220"/>
+            <a:ext cx="4297680" cy="4297680"/>
+          </a:xfrm>
+          <a:prstGeom prst="rect">
+            <a:avLst/>
+          </a:prstGeom>
+        </p:spPr>
+      </p:pic>
+      <p:sp>
+        <p:nvSpPr>
+          <p:cNvPr id="16" name="TextBox 15"/>
           <p:cNvSpPr txBox="1"/>
           <p:nvPr/>
         </p:nvSpPr>
@@ -7589,14 +8318,14 @@
                 </a:solidFill>
                 <a:latin typeface="Calibri"/>
               </a:rPr>
-              <a:t>Équipe 14 · Maillage</a:t>
-            </a:r>
-          </a:p>
-        </p:txBody>
-      </p:sp>
-      <p:sp>
-        <p:nvSpPr>
-          <p:cNvPr id="8" name="TextBox 7"/>
+              <a:t>Équipe 14 · Maillage  ·  Fond de carte : © OpenStreetMap, OpenFreeMap</a:t>
+            </a:r>
+          </a:p>
+        </p:txBody>
+      </p:sp>
+      <p:sp>
+        <p:nvSpPr>
+          <p:cNvPr id="17" name="TextBox 16"/>
           <p:cNvSpPr txBox="1"/>
           <p:nvPr/>
         </p:nvSpPr>

--- a/docs/pitch/Maillage.pptx
+++ b/docs/pitch/Maillage.pptx
@@ -763,7 +763,7 @@
           </a:p>
           <a:p>
             <a:r>
-              <a:t>Signal [CIAN] : dire « Maillage part des répertoires qui existent déjà : les 386 membres du fichier fourni par la SDC, et 614 organismes reconnus à l’échelle de la ville. Personne ne commence avec une page blanche. » Puis la Loi 25 : « Pour la Loi 25, le consentement décide. Ces répertoires pré-remplissent les fiches. Une fiche devient publique seulement après réclamation, avec un code et un consentement; en pilote, une fiche non réclamée n’est visible que par la SDC. Le code part à l’adresse que la SDC ou la Ville a déjà au dossier, jamais à celle qu’on tape. Dans cette démo, les fiches pré-remplies sont fictives et marquées. Les personnes, elles, ne sont jamais pré-remplies. » (Dans la démo, les neuf fiches pré-remplies fictives restent visibles sur la carte, voulu, avec l’étiquette « Pré-rempli · visible ici pour la démo », sans coordonnées : la règle du pilote n’est pas codée; ne pas dire le contraire.) Nos règles s’appuient aussi sur le Plan d’action Saint-Roch. (42 s)</a:t>
+              <a:t>Signal [CIAN] : dire « Maillage part des répertoires qui existent déjà : les 386 membres du fichier fourni par la SDC, et 614 organismes reconnus à l’échelle de la ville. Personne ne commence avec une page blanche. » Puis la Loi 25 : « Pour la Loi 25, le consentement décide. Ces répertoires pré-remplissent les fiches. Une fiche devient publique seulement après réclamation, avec un code et un consentement; en pilote, une fiche non réclamée n’est visible que par la SDC. Dans cette démo, la carte mêle des fiches fictives et de vrais commerces des données ouvertes du SIT Québec, chacun marqué pré-rempli tant que son responsable ne l’a pas réclamé. Les personnes, elles, ne sont jamais pré-remplies. » (Dans la démo, les fiches pré-remplies restent visibles sur la carte, voulu, avec l’étiquette « Pré-rempli · visible ici pour la démo », sans coordonnées : neuf fictives et seize commerces réels des données ouvertes du SIT Québec; la règle du pilote n’est pas codée; ne pas dire le contraire.) Nos règles s’appuient aussi sur le Plan d’action Saint-Roch. (42 s)</a:t>
             </a:r>
           </a:p>
         </p:txBody>
@@ -833,7 +833,7 @@
           <a:lstStyle/>
           <a:p>
             <a:r>
-              <a:t>Visuel : une carte de proposition avec « Pourquoi cette suggestion » et « À confirmer » surlignés; en bas, en petit : « Chaque suggestion s’explique. » Notes du test d’IA (pas sur la diapo, à voix haute seulement si on veut) : « Modèle multilingue dans le navigateur, gratuit, texte sur l’appareil (page /labo/) : 69 s au premier chargement (129 Mo), 13 s ensuite, 0,3 à 0,6 s par phrase. Trouve des profils semblables, pas complémentaires. » Ce modèle (paraphrase-multilingual-MiniLM) est multilingue. Déjà dans l’app : tolérance aux fautes, aux accents oubliés et à quelques mots d’anglais. Pas d’IA payante aujourd’hui; en phase 2, celui qui déploie la paie.</a:t>
+              <a:t>Visuel : une carte de proposition avec « Pourquoi cette suggestion » et « À confirmer » surlignés; en bas, en petit : « Chaque suggestion s’explique. » Notes du test d’IA (pas sur la diapo, à voix haute seulement si on veut) : « Modèle multilingue dans le navigateur, gratuit, texte sur l’appareil (page /labo/) : 69 s au premier chargement (environ 130 Mo), 13 s ensuite, 0,3 à 0,6 s par phrase. Trouve des profils semblables, pas complémentaires. » Ce modèle (paraphrase-multilingual-MiniLM) est multilingue. Déjà dans l’app : tolérance aux fautes, aux accents oubliés et à quelques mots d’anglais. Pas d’IA payante aujourd’hui; en phase 2, celui qui déploie la paie.</a:t>
             </a:r>
           </a:p>
           <a:p>
